--- a/pyqt_ppt/TurtleBot3_PyQt_Dashboard.pptx
+++ b/pyqt_ppt/TurtleBot3_PyQt_Dashboard.pptx
@@ -3283,7 +3283,7 @@
                 </a:solidFill>
                 <a:latin typeface="맑은 고딕"/>
               </a:rPr>
-              <a:t>TURTLEBOT3 · ROS2 HUMBLE · PYQT5</a:t>
+              <a:t>TEAM AURIX  ·  TURTLEBOT3 · ROS2 HUMBLE · PYQT5</a:t>
             </a:r>
           </a:p>
         </p:txBody>
@@ -3454,6 +3454,83 @@
                 <a:latin typeface="맑은 고딕"/>
               </a:rPr>
               <a:t>burger 모델 · ROS2 Humble · Ubuntu 22.04</a:t>
+            </a:r>
+          </a:p>
+        </p:txBody>
+      </p:sp>
+      <p:sp>
+        <p:nvSpPr>
+          <p:cNvPr id="10" name="TextBox 9"/>
+          <p:cNvSpPr txBox="1"/>
+          <p:nvPr/>
+        </p:nvSpPr>
+        <p:spPr>
+          <a:xfrm>
+            <a:off x="822960" y="6263640"/>
+            <a:ext cx="7315200" cy="365760"/>
+          </a:xfrm>
+          <a:prstGeom prst="rect">
+            <a:avLst/>
+          </a:prstGeom>
+          <a:noFill/>
+        </p:spPr>
+        <p:txBody>
+          <a:bodyPr wrap="square">
+            <a:spAutoFit/>
+          </a:bodyPr>
+          <a:lstStyle/>
+          <a:p>
+            <a:pPr algn="l">
+              <a:lnSpc>
+                <a:spcPct val="115000"/>
+              </a:lnSpc>
+              <a:spcAft>
+                <a:spcPts val="600"/>
+              </a:spcAft>
+            </a:pPr>
+            <a:r>
+              <a:rPr sz="1300" b="1">
+                <a:solidFill>
+                  <a:srgbClr val="64748B"/>
+                </a:solidFill>
+                <a:latin typeface="맑은 고딕"/>
+              </a:rPr>
+              <a:t>팀원   도희정 · 최치언</a:t>
+            </a:r>
+          </a:p>
+        </p:txBody>
+      </p:sp>
+      <p:sp>
+        <p:nvSpPr>
+          <p:cNvPr id="11" name="TextBox 10"/>
+          <p:cNvSpPr txBox="1"/>
+          <p:nvPr/>
+        </p:nvSpPr>
+        <p:spPr>
+          <a:xfrm>
+            <a:off x="10637215" y="201168"/>
+            <a:ext cx="1325880" cy="320040"/>
+          </a:xfrm>
+          <a:prstGeom prst="rect">
+            <a:avLst/>
+          </a:prstGeom>
+          <a:noFill/>
+        </p:spPr>
+        <p:txBody>
+          <a:bodyPr wrap="none">
+            <a:spAutoFit/>
+          </a:bodyPr>
+          <a:lstStyle/>
+          <a:p>
+            <a:pPr algn="r"/>
+            <a:r>
+              <a:rPr sz="1200" b="1">
+                <a:solidFill>
+                  <a:srgbClr val="64748B"/>
+                </a:solidFill>
+                <a:latin typeface="맑은 고딕"/>
+              </a:rPr>
+              <a:t>AURIX</a:t>
             </a:r>
           </a:p>
         </p:txBody>
@@ -3963,6 +4040,41 @@
           </a:p>
         </p:txBody>
       </p:sp>
+      <p:sp>
+        <p:nvSpPr>
+          <p:cNvPr id="11" name="TextBox 10"/>
+          <p:cNvSpPr txBox="1"/>
+          <p:nvPr/>
+        </p:nvSpPr>
+        <p:spPr>
+          <a:xfrm>
+            <a:off x="10637215" y="201168"/>
+            <a:ext cx="1325880" cy="320040"/>
+          </a:xfrm>
+          <a:prstGeom prst="rect">
+            <a:avLst/>
+          </a:prstGeom>
+          <a:noFill/>
+        </p:spPr>
+        <p:txBody>
+          <a:bodyPr wrap="none">
+            <a:spAutoFit/>
+          </a:bodyPr>
+          <a:lstStyle/>
+          <a:p>
+            <a:pPr algn="r"/>
+            <a:r>
+              <a:rPr sz="1200" b="1">
+                <a:solidFill>
+                  <a:srgbClr val="64748B"/>
+                </a:solidFill>
+                <a:latin typeface="맑은 고딕"/>
+              </a:rPr>
+              <a:t>AURIX</a:t>
+            </a:r>
+          </a:p>
+        </p:txBody>
+      </p:sp>
     </p:spTree>
   </p:cSld>
   <p:clrMapOvr>
@@ -4412,6 +4524,41 @@
           </a:p>
         </p:txBody>
       </p:sp>
+      <p:sp>
+        <p:nvSpPr>
+          <p:cNvPr id="11" name="TextBox 10"/>
+          <p:cNvSpPr txBox="1"/>
+          <p:nvPr/>
+        </p:nvSpPr>
+        <p:spPr>
+          <a:xfrm>
+            <a:off x="10637215" y="201168"/>
+            <a:ext cx="1325880" cy="320040"/>
+          </a:xfrm>
+          <a:prstGeom prst="rect">
+            <a:avLst/>
+          </a:prstGeom>
+          <a:noFill/>
+        </p:spPr>
+        <p:txBody>
+          <a:bodyPr wrap="none">
+            <a:spAutoFit/>
+          </a:bodyPr>
+          <a:lstStyle/>
+          <a:p>
+            <a:pPr algn="r"/>
+            <a:r>
+              <a:rPr sz="1200" b="1">
+                <a:solidFill>
+                  <a:srgbClr val="64748B"/>
+                </a:solidFill>
+                <a:latin typeface="맑은 고딕"/>
+              </a:rPr>
+              <a:t>AURIX</a:t>
+            </a:r>
+          </a:p>
+        </p:txBody>
+      </p:sp>
     </p:spTree>
   </p:cSld>
   <p:clrMapOvr>
@@ -4821,6 +4968,41 @@
           </a:p>
         </p:txBody>
       </p:sp>
+      <p:sp>
+        <p:nvSpPr>
+          <p:cNvPr id="9" name="TextBox 8"/>
+          <p:cNvSpPr txBox="1"/>
+          <p:nvPr/>
+        </p:nvSpPr>
+        <p:spPr>
+          <a:xfrm>
+            <a:off x="10637215" y="201168"/>
+            <a:ext cx="1325880" cy="320040"/>
+          </a:xfrm>
+          <a:prstGeom prst="rect">
+            <a:avLst/>
+          </a:prstGeom>
+          <a:noFill/>
+        </p:spPr>
+        <p:txBody>
+          <a:bodyPr wrap="none">
+            <a:spAutoFit/>
+          </a:bodyPr>
+          <a:lstStyle/>
+          <a:p>
+            <a:pPr algn="r"/>
+            <a:r>
+              <a:rPr sz="1200" b="1">
+                <a:solidFill>
+                  <a:srgbClr val="64748B"/>
+                </a:solidFill>
+                <a:latin typeface="맑은 고딕"/>
+              </a:rPr>
+              <a:t>AURIX</a:t>
+            </a:r>
+          </a:p>
+        </p:txBody>
+      </p:sp>
     </p:spTree>
   </p:cSld>
   <p:clrMapOvr>
@@ -5230,6 +5412,41 @@
           </a:p>
         </p:txBody>
       </p:sp>
+      <p:sp>
+        <p:nvSpPr>
+          <p:cNvPr id="9" name="TextBox 8"/>
+          <p:cNvSpPr txBox="1"/>
+          <p:nvPr/>
+        </p:nvSpPr>
+        <p:spPr>
+          <a:xfrm>
+            <a:off x="10637215" y="201168"/>
+            <a:ext cx="1325880" cy="320040"/>
+          </a:xfrm>
+          <a:prstGeom prst="rect">
+            <a:avLst/>
+          </a:prstGeom>
+          <a:noFill/>
+        </p:spPr>
+        <p:txBody>
+          <a:bodyPr wrap="none">
+            <a:spAutoFit/>
+          </a:bodyPr>
+          <a:lstStyle/>
+          <a:p>
+            <a:pPr algn="r"/>
+            <a:r>
+              <a:rPr sz="1200" b="1">
+                <a:solidFill>
+                  <a:srgbClr val="64748B"/>
+                </a:solidFill>
+                <a:latin typeface="맑은 고딕"/>
+              </a:rPr>
+              <a:t>AURIX</a:t>
+            </a:r>
+          </a:p>
+        </p:txBody>
+      </p:sp>
     </p:spTree>
   </p:cSld>
   <p:clrMapOvr>
@@ -6053,6 +6270,41 @@
           </a:p>
         </p:txBody>
       </p:sp>
+      <p:sp>
+        <p:nvSpPr>
+          <p:cNvPr id="14" name="TextBox 13"/>
+          <p:cNvSpPr txBox="1"/>
+          <p:nvPr/>
+        </p:nvSpPr>
+        <p:spPr>
+          <a:xfrm>
+            <a:off x="10637215" y="201168"/>
+            <a:ext cx="1325880" cy="320040"/>
+          </a:xfrm>
+          <a:prstGeom prst="rect">
+            <a:avLst/>
+          </a:prstGeom>
+          <a:noFill/>
+        </p:spPr>
+        <p:txBody>
+          <a:bodyPr wrap="none">
+            <a:spAutoFit/>
+          </a:bodyPr>
+          <a:lstStyle/>
+          <a:p>
+            <a:pPr algn="r"/>
+            <a:r>
+              <a:rPr sz="1200" b="1">
+                <a:solidFill>
+                  <a:srgbClr val="64748B"/>
+                </a:solidFill>
+                <a:latin typeface="맑은 고딕"/>
+              </a:rPr>
+              <a:t>AURIX</a:t>
+            </a:r>
+          </a:p>
+        </p:txBody>
+      </p:sp>
     </p:spTree>
   </p:cSld>
   <p:clrMapOvr>
@@ -7300,6 +7552,41 @@
           </a:p>
         </p:txBody>
       </p:sp>
+      <p:sp>
+        <p:nvSpPr>
+          <p:cNvPr id="28" name="TextBox 27"/>
+          <p:cNvSpPr txBox="1"/>
+          <p:nvPr/>
+        </p:nvSpPr>
+        <p:spPr>
+          <a:xfrm>
+            <a:off x="10637215" y="201168"/>
+            <a:ext cx="1325880" cy="320040"/>
+          </a:xfrm>
+          <a:prstGeom prst="rect">
+            <a:avLst/>
+          </a:prstGeom>
+          <a:noFill/>
+        </p:spPr>
+        <p:txBody>
+          <a:bodyPr wrap="none">
+            <a:spAutoFit/>
+          </a:bodyPr>
+          <a:lstStyle/>
+          <a:p>
+            <a:pPr algn="r"/>
+            <a:r>
+              <a:rPr sz="1200" b="1">
+                <a:solidFill>
+                  <a:srgbClr val="64748B"/>
+                </a:solidFill>
+                <a:latin typeface="맑은 고딕"/>
+              </a:rPr>
+              <a:t>AURIX</a:t>
+            </a:r>
+          </a:p>
+        </p:txBody>
+      </p:sp>
     </p:spTree>
   </p:cSld>
   <p:clrMapOvr>
@@ -7751,6 +8038,41 @@
           </a:p>
         </p:txBody>
       </p:sp>
+      <p:sp>
+        <p:nvSpPr>
+          <p:cNvPr id="10" name="TextBox 9"/>
+          <p:cNvSpPr txBox="1"/>
+          <p:nvPr/>
+        </p:nvSpPr>
+        <p:spPr>
+          <a:xfrm>
+            <a:off x="10637215" y="201168"/>
+            <a:ext cx="1325880" cy="320040"/>
+          </a:xfrm>
+          <a:prstGeom prst="rect">
+            <a:avLst/>
+          </a:prstGeom>
+          <a:noFill/>
+        </p:spPr>
+        <p:txBody>
+          <a:bodyPr wrap="none">
+            <a:spAutoFit/>
+          </a:bodyPr>
+          <a:lstStyle/>
+          <a:p>
+            <a:pPr algn="r"/>
+            <a:r>
+              <a:rPr sz="1200" b="1">
+                <a:solidFill>
+                  <a:srgbClr val="64748B"/>
+                </a:solidFill>
+                <a:latin typeface="맑은 고딕"/>
+              </a:rPr>
+              <a:t>AURIX</a:t>
+            </a:r>
+          </a:p>
+        </p:txBody>
+      </p:sp>
     </p:spTree>
   </p:cSld>
   <p:clrMapOvr>
@@ -8202,6 +8524,41 @@
           </a:p>
         </p:txBody>
       </p:sp>
+      <p:sp>
+        <p:nvSpPr>
+          <p:cNvPr id="10" name="TextBox 9"/>
+          <p:cNvSpPr txBox="1"/>
+          <p:nvPr/>
+        </p:nvSpPr>
+        <p:spPr>
+          <a:xfrm>
+            <a:off x="10637215" y="201168"/>
+            <a:ext cx="1325880" cy="320040"/>
+          </a:xfrm>
+          <a:prstGeom prst="rect">
+            <a:avLst/>
+          </a:prstGeom>
+          <a:noFill/>
+        </p:spPr>
+        <p:txBody>
+          <a:bodyPr wrap="none">
+            <a:spAutoFit/>
+          </a:bodyPr>
+          <a:lstStyle/>
+          <a:p>
+            <a:pPr algn="r"/>
+            <a:r>
+              <a:rPr sz="1200" b="1">
+                <a:solidFill>
+                  <a:srgbClr val="64748B"/>
+                </a:solidFill>
+                <a:latin typeface="맑은 고딕"/>
+              </a:rPr>
+              <a:t>AURIX</a:t>
+            </a:r>
+          </a:p>
+        </p:txBody>
+      </p:sp>
     </p:spTree>
   </p:cSld>
   <p:clrMapOvr>
@@ -8625,6 +8982,41 @@
           </a:p>
         </p:txBody>
       </p:sp>
+      <p:sp>
+        <p:nvSpPr>
+          <p:cNvPr id="10" name="TextBox 9"/>
+          <p:cNvSpPr txBox="1"/>
+          <p:nvPr/>
+        </p:nvSpPr>
+        <p:spPr>
+          <a:xfrm>
+            <a:off x="10637215" y="201168"/>
+            <a:ext cx="1325880" cy="320040"/>
+          </a:xfrm>
+          <a:prstGeom prst="rect">
+            <a:avLst/>
+          </a:prstGeom>
+          <a:noFill/>
+        </p:spPr>
+        <p:txBody>
+          <a:bodyPr wrap="none">
+            <a:spAutoFit/>
+          </a:bodyPr>
+          <a:lstStyle/>
+          <a:p>
+            <a:pPr algn="r"/>
+            <a:r>
+              <a:rPr sz="1200" b="1">
+                <a:solidFill>
+                  <a:srgbClr val="64748B"/>
+                </a:solidFill>
+                <a:latin typeface="맑은 고딕"/>
+              </a:rPr>
+              <a:t>AURIX</a:t>
+            </a:r>
+          </a:p>
+        </p:txBody>
+      </p:sp>
     </p:spTree>
   </p:cSld>
   <p:clrMapOvr>
@@ -9097,6 +9489,41 @@
           </a:p>
         </p:txBody>
       </p:sp>
+      <p:sp>
+        <p:nvSpPr>
+          <p:cNvPr id="10" name="TextBox 9"/>
+          <p:cNvSpPr txBox="1"/>
+          <p:nvPr/>
+        </p:nvSpPr>
+        <p:spPr>
+          <a:xfrm>
+            <a:off x="10637215" y="201168"/>
+            <a:ext cx="1325880" cy="320040"/>
+          </a:xfrm>
+          <a:prstGeom prst="rect">
+            <a:avLst/>
+          </a:prstGeom>
+          <a:noFill/>
+        </p:spPr>
+        <p:txBody>
+          <a:bodyPr wrap="none">
+            <a:spAutoFit/>
+          </a:bodyPr>
+          <a:lstStyle/>
+          <a:p>
+            <a:pPr algn="r"/>
+            <a:r>
+              <a:rPr sz="1200" b="1">
+                <a:solidFill>
+                  <a:srgbClr val="64748B"/>
+                </a:solidFill>
+                <a:latin typeface="맑은 고딕"/>
+              </a:rPr>
+              <a:t>AURIX</a:t>
+            </a:r>
+          </a:p>
+        </p:txBody>
+      </p:sp>
     </p:spTree>
   </p:cSld>
   <p:clrMapOvr>
@@ -9569,6 +9996,41 @@
           </a:p>
         </p:txBody>
       </p:sp>
+      <p:sp>
+        <p:nvSpPr>
+          <p:cNvPr id="10" name="TextBox 9"/>
+          <p:cNvSpPr txBox="1"/>
+          <p:nvPr/>
+        </p:nvSpPr>
+        <p:spPr>
+          <a:xfrm>
+            <a:off x="10637215" y="201168"/>
+            <a:ext cx="1325880" cy="320040"/>
+          </a:xfrm>
+          <a:prstGeom prst="rect">
+            <a:avLst/>
+          </a:prstGeom>
+          <a:noFill/>
+        </p:spPr>
+        <p:txBody>
+          <a:bodyPr wrap="none">
+            <a:spAutoFit/>
+          </a:bodyPr>
+          <a:lstStyle/>
+          <a:p>
+            <a:pPr algn="r"/>
+            <a:r>
+              <a:rPr sz="1200" b="1">
+                <a:solidFill>
+                  <a:srgbClr val="64748B"/>
+                </a:solidFill>
+                <a:latin typeface="맑은 고딕"/>
+              </a:rPr>
+              <a:t>AURIX</a:t>
+            </a:r>
+          </a:p>
+        </p:txBody>
+      </p:sp>
     </p:spTree>
   </p:cSld>
   <p:clrMapOvr>
@@ -10371,6 +10833,41 @@
           </a:p>
         </p:txBody>
       </p:sp>
+      <p:sp>
+        <p:nvSpPr>
+          <p:cNvPr id="20" name="TextBox 19"/>
+          <p:cNvSpPr txBox="1"/>
+          <p:nvPr/>
+        </p:nvSpPr>
+        <p:spPr>
+          <a:xfrm>
+            <a:off x="10637215" y="201168"/>
+            <a:ext cx="1325880" cy="320040"/>
+          </a:xfrm>
+          <a:prstGeom prst="rect">
+            <a:avLst/>
+          </a:prstGeom>
+          <a:noFill/>
+        </p:spPr>
+        <p:txBody>
+          <a:bodyPr wrap="none">
+            <a:spAutoFit/>
+          </a:bodyPr>
+          <a:lstStyle/>
+          <a:p>
+            <a:pPr algn="r"/>
+            <a:r>
+              <a:rPr sz="1200" b="1">
+                <a:solidFill>
+                  <a:srgbClr val="64748B"/>
+                </a:solidFill>
+                <a:latin typeface="맑은 고딕"/>
+              </a:rPr>
+              <a:t>AURIX</a:t>
+            </a:r>
+          </a:p>
+        </p:txBody>
+      </p:sp>
     </p:spTree>
   </p:cSld>
   <p:clrMapOvr>
@@ -11173,6 +11670,41 @@
           </a:p>
         </p:txBody>
       </p:sp>
+      <p:sp>
+        <p:nvSpPr>
+          <p:cNvPr id="20" name="TextBox 19"/>
+          <p:cNvSpPr txBox="1"/>
+          <p:nvPr/>
+        </p:nvSpPr>
+        <p:spPr>
+          <a:xfrm>
+            <a:off x="10637215" y="201168"/>
+            <a:ext cx="1325880" cy="320040"/>
+          </a:xfrm>
+          <a:prstGeom prst="rect">
+            <a:avLst/>
+          </a:prstGeom>
+          <a:noFill/>
+        </p:spPr>
+        <p:txBody>
+          <a:bodyPr wrap="none">
+            <a:spAutoFit/>
+          </a:bodyPr>
+          <a:lstStyle/>
+          <a:p>
+            <a:pPr algn="r"/>
+            <a:r>
+              <a:rPr sz="1200" b="1">
+                <a:solidFill>
+                  <a:srgbClr val="64748B"/>
+                </a:solidFill>
+                <a:latin typeface="맑은 고딕"/>
+              </a:rPr>
+              <a:t>AURIX</a:t>
+            </a:r>
+          </a:p>
+        </p:txBody>
+      </p:sp>
     </p:spTree>
   </p:cSld>
   <p:clrMapOvr>
@@ -11975,6 +12507,41 @@
           </a:p>
         </p:txBody>
       </p:sp>
+      <p:sp>
+        <p:nvSpPr>
+          <p:cNvPr id="20" name="TextBox 19"/>
+          <p:cNvSpPr txBox="1"/>
+          <p:nvPr/>
+        </p:nvSpPr>
+        <p:spPr>
+          <a:xfrm>
+            <a:off x="10637215" y="201168"/>
+            <a:ext cx="1325880" cy="320040"/>
+          </a:xfrm>
+          <a:prstGeom prst="rect">
+            <a:avLst/>
+          </a:prstGeom>
+          <a:noFill/>
+        </p:spPr>
+        <p:txBody>
+          <a:bodyPr wrap="none">
+            <a:spAutoFit/>
+          </a:bodyPr>
+          <a:lstStyle/>
+          <a:p>
+            <a:pPr algn="r"/>
+            <a:r>
+              <a:rPr sz="1200" b="1">
+                <a:solidFill>
+                  <a:srgbClr val="64748B"/>
+                </a:solidFill>
+                <a:latin typeface="맑은 고딕"/>
+              </a:rPr>
+              <a:t>AURIX</a:t>
+            </a:r>
+          </a:p>
+        </p:txBody>
+      </p:sp>
     </p:spTree>
   </p:cSld>
   <p:clrMapOvr>
@@ -12777,6 +13344,41 @@
           </a:p>
         </p:txBody>
       </p:sp>
+      <p:sp>
+        <p:nvSpPr>
+          <p:cNvPr id="20" name="TextBox 19"/>
+          <p:cNvSpPr txBox="1"/>
+          <p:nvPr/>
+        </p:nvSpPr>
+        <p:spPr>
+          <a:xfrm>
+            <a:off x="10637215" y="201168"/>
+            <a:ext cx="1325880" cy="320040"/>
+          </a:xfrm>
+          <a:prstGeom prst="rect">
+            <a:avLst/>
+          </a:prstGeom>
+          <a:noFill/>
+        </p:spPr>
+        <p:txBody>
+          <a:bodyPr wrap="none">
+            <a:spAutoFit/>
+          </a:bodyPr>
+          <a:lstStyle/>
+          <a:p>
+            <a:pPr algn="r"/>
+            <a:r>
+              <a:rPr sz="1200" b="1">
+                <a:solidFill>
+                  <a:srgbClr val="64748B"/>
+                </a:solidFill>
+                <a:latin typeface="맑은 고딕"/>
+              </a:rPr>
+              <a:t>AURIX</a:t>
+            </a:r>
+          </a:p>
+        </p:txBody>
+      </p:sp>
     </p:spTree>
   </p:cSld>
   <p:clrMapOvr>
@@ -13579,6 +14181,41 @@
           </a:p>
         </p:txBody>
       </p:sp>
+      <p:sp>
+        <p:nvSpPr>
+          <p:cNvPr id="20" name="TextBox 19"/>
+          <p:cNvSpPr txBox="1"/>
+          <p:nvPr/>
+        </p:nvSpPr>
+        <p:spPr>
+          <a:xfrm>
+            <a:off x="10637215" y="201168"/>
+            <a:ext cx="1325880" cy="320040"/>
+          </a:xfrm>
+          <a:prstGeom prst="rect">
+            <a:avLst/>
+          </a:prstGeom>
+          <a:noFill/>
+        </p:spPr>
+        <p:txBody>
+          <a:bodyPr wrap="none">
+            <a:spAutoFit/>
+          </a:bodyPr>
+          <a:lstStyle/>
+          <a:p>
+            <a:pPr algn="r"/>
+            <a:r>
+              <a:rPr sz="1200" b="1">
+                <a:solidFill>
+                  <a:srgbClr val="64748B"/>
+                </a:solidFill>
+                <a:latin typeface="맑은 고딕"/>
+              </a:rPr>
+              <a:t>AURIX</a:t>
+            </a:r>
+          </a:p>
+        </p:txBody>
+      </p:sp>
     </p:spTree>
   </p:cSld>
   <p:clrMapOvr>
@@ -14423,6 +15060,41 @@
           </a:p>
         </p:txBody>
       </p:sp>
+      <p:sp>
+        <p:nvSpPr>
+          <p:cNvPr id="21" name="TextBox 20"/>
+          <p:cNvSpPr txBox="1"/>
+          <p:nvPr/>
+        </p:nvSpPr>
+        <p:spPr>
+          <a:xfrm>
+            <a:off x="10637215" y="201168"/>
+            <a:ext cx="1325880" cy="320040"/>
+          </a:xfrm>
+          <a:prstGeom prst="rect">
+            <a:avLst/>
+          </a:prstGeom>
+          <a:noFill/>
+        </p:spPr>
+        <p:txBody>
+          <a:bodyPr wrap="none">
+            <a:spAutoFit/>
+          </a:bodyPr>
+          <a:lstStyle/>
+          <a:p>
+            <a:pPr algn="r"/>
+            <a:r>
+              <a:rPr sz="1200" b="1">
+                <a:solidFill>
+                  <a:srgbClr val="64748B"/>
+                </a:solidFill>
+                <a:latin typeface="맑은 고딕"/>
+              </a:rPr>
+              <a:t>AURIX</a:t>
+            </a:r>
+          </a:p>
+        </p:txBody>
+      </p:sp>
     </p:spTree>
   </p:cSld>
   <p:clrMapOvr>
@@ -15267,6 +15939,41 @@
           </a:p>
         </p:txBody>
       </p:sp>
+      <p:sp>
+        <p:nvSpPr>
+          <p:cNvPr id="21" name="TextBox 20"/>
+          <p:cNvSpPr txBox="1"/>
+          <p:nvPr/>
+        </p:nvSpPr>
+        <p:spPr>
+          <a:xfrm>
+            <a:off x="10637215" y="201168"/>
+            <a:ext cx="1325880" cy="320040"/>
+          </a:xfrm>
+          <a:prstGeom prst="rect">
+            <a:avLst/>
+          </a:prstGeom>
+          <a:noFill/>
+        </p:spPr>
+        <p:txBody>
+          <a:bodyPr wrap="none">
+            <a:spAutoFit/>
+          </a:bodyPr>
+          <a:lstStyle/>
+          <a:p>
+            <a:pPr algn="r"/>
+            <a:r>
+              <a:rPr sz="1200" b="1">
+                <a:solidFill>
+                  <a:srgbClr val="64748B"/>
+                </a:solidFill>
+                <a:latin typeface="맑은 고딕"/>
+              </a:rPr>
+              <a:t>AURIX</a:t>
+            </a:r>
+          </a:p>
+        </p:txBody>
+      </p:sp>
     </p:spTree>
   </p:cSld>
   <p:clrMapOvr>
@@ -15600,6 +16307,41 @@
           </a:p>
         </p:txBody>
       </p:sp>
+      <p:sp>
+        <p:nvSpPr>
+          <p:cNvPr id="8" name="TextBox 7"/>
+          <p:cNvSpPr txBox="1"/>
+          <p:nvPr/>
+        </p:nvSpPr>
+        <p:spPr>
+          <a:xfrm>
+            <a:off x="10637215" y="201168"/>
+            <a:ext cx="1325880" cy="320040"/>
+          </a:xfrm>
+          <a:prstGeom prst="rect">
+            <a:avLst/>
+          </a:prstGeom>
+          <a:noFill/>
+        </p:spPr>
+        <p:txBody>
+          <a:bodyPr wrap="none">
+            <a:spAutoFit/>
+          </a:bodyPr>
+          <a:lstStyle/>
+          <a:p>
+            <a:pPr algn="r"/>
+            <a:r>
+              <a:rPr sz="1200" b="1">
+                <a:solidFill>
+                  <a:srgbClr val="64748B"/>
+                </a:solidFill>
+                <a:latin typeface="맑은 고딕"/>
+              </a:rPr>
+              <a:t>AURIX</a:t>
+            </a:r>
+          </a:p>
+        </p:txBody>
+      </p:sp>
     </p:spTree>
   </p:cSld>
   <p:clrMapOvr>
@@ -16463,6 +17205,41 @@
           </a:p>
         </p:txBody>
       </p:sp>
+      <p:sp>
+        <p:nvSpPr>
+          <p:cNvPr id="21" name="TextBox 20"/>
+          <p:cNvSpPr txBox="1"/>
+          <p:nvPr/>
+        </p:nvSpPr>
+        <p:spPr>
+          <a:xfrm>
+            <a:off x="10637215" y="201168"/>
+            <a:ext cx="1325880" cy="320040"/>
+          </a:xfrm>
+          <a:prstGeom prst="rect">
+            <a:avLst/>
+          </a:prstGeom>
+          <a:noFill/>
+        </p:spPr>
+        <p:txBody>
+          <a:bodyPr wrap="none">
+            <a:spAutoFit/>
+          </a:bodyPr>
+          <a:lstStyle/>
+          <a:p>
+            <a:pPr algn="r"/>
+            <a:r>
+              <a:rPr sz="1200" b="1">
+                <a:solidFill>
+                  <a:srgbClr val="64748B"/>
+                </a:solidFill>
+                <a:latin typeface="맑은 고딕"/>
+              </a:rPr>
+              <a:t>AURIX</a:t>
+            </a:r>
+          </a:p>
+        </p:txBody>
+      </p:sp>
     </p:spTree>
   </p:cSld>
   <p:clrMapOvr>
@@ -17517,6 +18294,41 @@
           </a:p>
         </p:txBody>
       </p:sp>
+      <p:sp>
+        <p:nvSpPr>
+          <p:cNvPr id="26" name="TextBox 25"/>
+          <p:cNvSpPr txBox="1"/>
+          <p:nvPr/>
+        </p:nvSpPr>
+        <p:spPr>
+          <a:xfrm>
+            <a:off x="10637215" y="201168"/>
+            <a:ext cx="1325880" cy="320040"/>
+          </a:xfrm>
+          <a:prstGeom prst="rect">
+            <a:avLst/>
+          </a:prstGeom>
+          <a:noFill/>
+        </p:spPr>
+        <p:txBody>
+          <a:bodyPr wrap="none">
+            <a:spAutoFit/>
+          </a:bodyPr>
+          <a:lstStyle/>
+          <a:p>
+            <a:pPr algn="r"/>
+            <a:r>
+              <a:rPr sz="1200" b="1">
+                <a:solidFill>
+                  <a:srgbClr val="64748B"/>
+                </a:solidFill>
+                <a:latin typeface="맑은 고딕"/>
+              </a:rPr>
+              <a:t>AURIX</a:t>
+            </a:r>
+          </a:p>
+        </p:txBody>
+      </p:sp>
     </p:spTree>
   </p:cSld>
   <p:clrMapOvr>
@@ -19337,6 +20149,41 @@
           </a:p>
         </p:txBody>
       </p:sp>
+      <p:sp>
+        <p:nvSpPr>
+          <p:cNvPr id="44" name="TextBox 43"/>
+          <p:cNvSpPr txBox="1"/>
+          <p:nvPr/>
+        </p:nvSpPr>
+        <p:spPr>
+          <a:xfrm>
+            <a:off x="10637215" y="201168"/>
+            <a:ext cx="1325880" cy="320040"/>
+          </a:xfrm>
+          <a:prstGeom prst="rect">
+            <a:avLst/>
+          </a:prstGeom>
+          <a:noFill/>
+        </p:spPr>
+        <p:txBody>
+          <a:bodyPr wrap="none">
+            <a:spAutoFit/>
+          </a:bodyPr>
+          <a:lstStyle/>
+          <a:p>
+            <a:pPr algn="r"/>
+            <a:r>
+              <a:rPr sz="1200" b="1">
+                <a:solidFill>
+                  <a:srgbClr val="64748B"/>
+                </a:solidFill>
+                <a:latin typeface="맑은 고딕"/>
+              </a:rPr>
+              <a:t>AURIX</a:t>
+            </a:r>
+          </a:p>
+        </p:txBody>
+      </p:sp>
     </p:spTree>
   </p:cSld>
   <p:clrMapOvr>
@@ -19965,6 +20812,41 @@
           </a:p>
         </p:txBody>
       </p:sp>
+      <p:sp>
+        <p:nvSpPr>
+          <p:cNvPr id="10" name="TextBox 9"/>
+          <p:cNvSpPr txBox="1"/>
+          <p:nvPr/>
+        </p:nvSpPr>
+        <p:spPr>
+          <a:xfrm>
+            <a:off x="10637215" y="201168"/>
+            <a:ext cx="1325880" cy="320040"/>
+          </a:xfrm>
+          <a:prstGeom prst="rect">
+            <a:avLst/>
+          </a:prstGeom>
+          <a:noFill/>
+        </p:spPr>
+        <p:txBody>
+          <a:bodyPr wrap="none">
+            <a:spAutoFit/>
+          </a:bodyPr>
+          <a:lstStyle/>
+          <a:p>
+            <a:pPr algn="r"/>
+            <a:r>
+              <a:rPr sz="1200" b="1">
+                <a:solidFill>
+                  <a:srgbClr val="64748B"/>
+                </a:solidFill>
+                <a:latin typeface="맑은 고딕"/>
+              </a:rPr>
+              <a:t>AURIX</a:t>
+            </a:r>
+          </a:p>
+        </p:txBody>
+      </p:sp>
     </p:spTree>
   </p:cSld>
   <p:clrMapOvr>
@@ -21012,6 +21894,41 @@
           </a:p>
         </p:txBody>
       </p:sp>
+      <p:sp>
+        <p:nvSpPr>
+          <p:cNvPr id="25" name="TextBox 24"/>
+          <p:cNvSpPr txBox="1"/>
+          <p:nvPr/>
+        </p:nvSpPr>
+        <p:spPr>
+          <a:xfrm>
+            <a:off x="10637215" y="201168"/>
+            <a:ext cx="1325880" cy="320040"/>
+          </a:xfrm>
+          <a:prstGeom prst="rect">
+            <a:avLst/>
+          </a:prstGeom>
+          <a:noFill/>
+        </p:spPr>
+        <p:txBody>
+          <a:bodyPr wrap="none">
+            <a:spAutoFit/>
+          </a:bodyPr>
+          <a:lstStyle/>
+          <a:p>
+            <a:pPr algn="r"/>
+            <a:r>
+              <a:rPr sz="1200" b="1">
+                <a:solidFill>
+                  <a:srgbClr val="64748B"/>
+                </a:solidFill>
+                <a:latin typeface="맑은 고딕"/>
+              </a:rPr>
+              <a:t>AURIX</a:t>
+            </a:r>
+          </a:p>
+        </p:txBody>
+      </p:sp>
     </p:spTree>
   </p:cSld>
   <p:clrMapOvr>
@@ -21461,6 +22378,41 @@
           </a:p>
         </p:txBody>
       </p:sp>
+      <p:sp>
+        <p:nvSpPr>
+          <p:cNvPr id="11" name="TextBox 10"/>
+          <p:cNvSpPr txBox="1"/>
+          <p:nvPr/>
+        </p:nvSpPr>
+        <p:spPr>
+          <a:xfrm>
+            <a:off x="10637215" y="201168"/>
+            <a:ext cx="1325880" cy="320040"/>
+          </a:xfrm>
+          <a:prstGeom prst="rect">
+            <a:avLst/>
+          </a:prstGeom>
+          <a:noFill/>
+        </p:spPr>
+        <p:txBody>
+          <a:bodyPr wrap="none">
+            <a:spAutoFit/>
+          </a:bodyPr>
+          <a:lstStyle/>
+          <a:p>
+            <a:pPr algn="r"/>
+            <a:r>
+              <a:rPr sz="1200" b="1">
+                <a:solidFill>
+                  <a:srgbClr val="64748B"/>
+                </a:solidFill>
+                <a:latin typeface="맑은 고딕"/>
+              </a:rPr>
+              <a:t>AURIX</a:t>
+            </a:r>
+          </a:p>
+        </p:txBody>
+      </p:sp>
     </p:spTree>
   </p:cSld>
   <p:clrMapOvr>
@@ -21962,6 +22914,41 @@
                 <a:latin typeface="맑은 고딕"/>
               </a:rPr>
               <a:t>8</a:t>
+            </a:r>
+          </a:p>
+        </p:txBody>
+      </p:sp>
+      <p:sp>
+        <p:nvSpPr>
+          <p:cNvPr id="11" name="TextBox 10"/>
+          <p:cNvSpPr txBox="1"/>
+          <p:nvPr/>
+        </p:nvSpPr>
+        <p:spPr>
+          <a:xfrm>
+            <a:off x="10637215" y="201168"/>
+            <a:ext cx="1325880" cy="320040"/>
+          </a:xfrm>
+          <a:prstGeom prst="rect">
+            <a:avLst/>
+          </a:prstGeom>
+          <a:noFill/>
+        </p:spPr>
+        <p:txBody>
+          <a:bodyPr wrap="none">
+            <a:spAutoFit/>
+          </a:bodyPr>
+          <a:lstStyle/>
+          <a:p>
+            <a:pPr algn="r"/>
+            <a:r>
+              <a:rPr sz="1200" b="1">
+                <a:solidFill>
+                  <a:srgbClr val="64748B"/>
+                </a:solidFill>
+                <a:latin typeface="맑은 고딕"/>
+              </a:rPr>
+              <a:t>AURIX</a:t>
             </a:r>
           </a:p>
         </p:txBody>

--- a/pyqt_ppt/TurtleBot3_PyQt_Dashboard.pptx
+++ b/pyqt_ppt/TurtleBot3_PyQt_Dashboard.pptx
@@ -5,35 +5,36 @@
     <p:sldMasterId id="2147483648" r:id="rId1"/>
   </p:sldMasterIdLst>
   <p:sldIdLst>
-    <p:sldId id="256" r:id="rId7"/>
-    <p:sldId id="257" r:id="rId8"/>
-    <p:sldId id="258" r:id="rId9"/>
-    <p:sldId id="259" r:id="rId10"/>
-    <p:sldId id="260" r:id="rId11"/>
-    <p:sldId id="261" r:id="rId12"/>
-    <p:sldId id="262" r:id="rId13"/>
-    <p:sldId id="263" r:id="rId14"/>
-    <p:sldId id="264" r:id="rId15"/>
-    <p:sldId id="265" r:id="rId16"/>
-    <p:sldId id="266" r:id="rId17"/>
-    <p:sldId id="267" r:id="rId18"/>
-    <p:sldId id="268" r:id="rId19"/>
-    <p:sldId id="269" r:id="rId20"/>
-    <p:sldId id="270" r:id="rId21"/>
-    <p:sldId id="271" r:id="rId22"/>
-    <p:sldId id="272" r:id="rId23"/>
-    <p:sldId id="273" r:id="rId24"/>
-    <p:sldId id="274" r:id="rId25"/>
-    <p:sldId id="275" r:id="rId26"/>
-    <p:sldId id="276" r:id="rId27"/>
-    <p:sldId id="277" r:id="rId28"/>
-    <p:sldId id="278" r:id="rId29"/>
-    <p:sldId id="279" r:id="rId30"/>
-    <p:sldId id="280" r:id="rId31"/>
-    <p:sldId id="281" r:id="rId32"/>
-    <p:sldId id="282" r:id="rId33"/>
+    <p:sldId id="256" r:id="rId2"/>
+    <p:sldId id="257" r:id="rId3"/>
+    <p:sldId id="258" r:id="rId4"/>
+    <p:sldId id="259" r:id="rId5"/>
+    <p:sldId id="260" r:id="rId6"/>
+    <p:sldId id="261" r:id="rId7"/>
+    <p:sldId id="262" r:id="rId8"/>
+    <p:sldId id="263" r:id="rId9"/>
+    <p:sldId id="264" r:id="rId10"/>
+    <p:sldId id="265" r:id="rId11"/>
+    <p:sldId id="266" r:id="rId12"/>
+    <p:sldId id="267" r:id="rId13"/>
+    <p:sldId id="268" r:id="rId14"/>
+    <p:sldId id="269" r:id="rId15"/>
+    <p:sldId id="270" r:id="rId16"/>
+    <p:sldId id="271" r:id="rId17"/>
+    <p:sldId id="272" r:id="rId18"/>
+    <p:sldId id="273" r:id="rId19"/>
+    <p:sldId id="274" r:id="rId20"/>
+    <p:sldId id="275" r:id="rId21"/>
+    <p:sldId id="276" r:id="rId22"/>
+    <p:sldId id="277" r:id="rId23"/>
+    <p:sldId id="278" r:id="rId24"/>
+    <p:sldId id="279" r:id="rId25"/>
+    <p:sldId id="280" r:id="rId26"/>
+    <p:sldId id="281" r:id="rId27"/>
+    <p:sldId id="282" r:id="rId28"/>
+    <p:sldId id="283" r:id="rId29"/>
   </p:sldIdLst>
-  <p:sldSz cx="12191695" cy="6858000" type="screen4x3"/>
+  <p:sldSz cx="12192000" cy="6858000"/>
   <p:notesSz cx="6858000" cy="9144000"/>
   <p:defaultTextStyle>
     <a:defPPr>
@@ -130,6 +131,22 @@
       </a:defRPr>
     </a:lvl9pPr>
   </p:defaultTextStyle>
+  <p:extLst>
+    <p:ext uri="{EFAFB233-063F-42B5-8137-9DF3F51BA10A}">
+      <p15:sldGuideLst xmlns:p15="http://schemas.microsoft.com/office/powerpoint/2012/main">
+        <p15:guide id="1" orient="horz" pos="2160">
+          <p15:clr>
+            <a:srgbClr val="A4A3A4"/>
+          </p15:clr>
+        </p15:guide>
+        <p15:guide id="2" pos="2880">
+          <p15:clr>
+            <a:srgbClr val="A4A3A4"/>
+          </p15:clr>
+        </p15:guide>
+      </p15:sldGuideLst>
+    </p:ext>
+  </p:extLst>
 </p:presentation>
 </file>
 
@@ -171,10 +188,9 @@
           <a:lstStyle/>
           <a:p>
             <a:r>
-              <a:rPr lang="en-US" smtClean="0"/>
+              <a:rPr lang="en-US"/>
               <a:t>Click to edit Master title style</a:t>
             </a:r>
-            <a:endParaRPr lang="en-US"/>
           </a:p>
         </p:txBody>
       </p:sp>
@@ -290,10 +306,9 @@
           </a:lstStyle>
           <a:p>
             <a:r>
-              <a:rPr lang="en-US" smtClean="0"/>
+              <a:rPr lang="en-US"/>
               <a:t>Click to edit Master subtitle style</a:t>
             </a:r>
-            <a:endParaRPr lang="en-US"/>
           </a:p>
         </p:txBody>
       </p:sp>
@@ -314,7 +329,7 @@
           <a:p>
             <a:fld id="{5BCAD085-E8A6-8845-BD4E-CB4CCA059FC4}" type="datetimeFigureOut">
               <a:rPr lang="en-US" smtClean="0"/>
-              <a:t>1/27/13</a:t>
+              <a:t>7/9/2026</a:t>
             </a:fld>
             <a:endParaRPr lang="en-US"/>
           </a:p>
@@ -408,10 +423,9 @@
           <a:lstStyle/>
           <a:p>
             <a:r>
-              <a:rPr lang="en-US" smtClean="0"/>
+              <a:rPr lang="en-US"/>
               <a:t>Click to edit Master title style</a:t>
             </a:r>
-            <a:endParaRPr lang="en-US"/>
           </a:p>
         </p:txBody>
       </p:sp>
@@ -432,38 +446,37 @@
           <a:p>
             <a:pPr lvl="0"/>
             <a:r>
-              <a:rPr lang="en-US" smtClean="0"/>
+              <a:rPr lang="en-US"/>
               <a:t>Click to edit Master text styles</a:t>
             </a:r>
           </a:p>
           <a:p>
             <a:pPr lvl="1"/>
             <a:r>
-              <a:rPr lang="en-US" smtClean="0"/>
+              <a:rPr lang="en-US"/>
               <a:t>Second level</a:t>
             </a:r>
           </a:p>
           <a:p>
             <a:pPr lvl="2"/>
             <a:r>
-              <a:rPr lang="en-US" smtClean="0"/>
+              <a:rPr lang="en-US"/>
               <a:t>Third level</a:t>
             </a:r>
           </a:p>
           <a:p>
             <a:pPr lvl="3"/>
             <a:r>
-              <a:rPr lang="en-US" smtClean="0"/>
+              <a:rPr lang="en-US"/>
               <a:t>Fourth level</a:t>
             </a:r>
           </a:p>
           <a:p>
             <a:pPr lvl="4"/>
             <a:r>
-              <a:rPr lang="en-US" smtClean="0"/>
+              <a:rPr lang="en-US"/>
               <a:t>Fifth level</a:t>
             </a:r>
-            <a:endParaRPr lang="en-US"/>
           </a:p>
         </p:txBody>
       </p:sp>
@@ -484,7 +497,7 @@
           <a:p>
             <a:fld id="{5BCAD085-E8A6-8845-BD4E-CB4CCA059FC4}" type="datetimeFigureOut">
               <a:rPr lang="en-US" smtClean="0"/>
-              <a:t>1/27/13</a:t>
+              <a:t>7/9/2026</a:t>
             </a:fld>
             <a:endParaRPr lang="en-US"/>
           </a:p>
@@ -583,10 +596,9 @@
           <a:lstStyle/>
           <a:p>
             <a:r>
-              <a:rPr lang="en-US" smtClean="0"/>
+              <a:rPr lang="en-US"/>
               <a:t>Click to edit Master title style</a:t>
             </a:r>
-            <a:endParaRPr lang="en-US"/>
           </a:p>
         </p:txBody>
       </p:sp>
@@ -612,38 +624,37 @@
           <a:p>
             <a:pPr lvl="0"/>
             <a:r>
-              <a:rPr lang="en-US" smtClean="0"/>
+              <a:rPr lang="en-US"/>
               <a:t>Click to edit Master text styles</a:t>
             </a:r>
           </a:p>
           <a:p>
             <a:pPr lvl="1"/>
             <a:r>
-              <a:rPr lang="en-US" smtClean="0"/>
+              <a:rPr lang="en-US"/>
               <a:t>Second level</a:t>
             </a:r>
           </a:p>
           <a:p>
             <a:pPr lvl="2"/>
             <a:r>
-              <a:rPr lang="en-US" smtClean="0"/>
+              <a:rPr lang="en-US"/>
               <a:t>Third level</a:t>
             </a:r>
           </a:p>
           <a:p>
             <a:pPr lvl="3"/>
             <a:r>
-              <a:rPr lang="en-US" smtClean="0"/>
+              <a:rPr lang="en-US"/>
               <a:t>Fourth level</a:t>
             </a:r>
           </a:p>
           <a:p>
             <a:pPr lvl="4"/>
             <a:r>
-              <a:rPr lang="en-US" smtClean="0"/>
+              <a:rPr lang="en-US"/>
               <a:t>Fifth level</a:t>
             </a:r>
-            <a:endParaRPr lang="en-US"/>
           </a:p>
         </p:txBody>
       </p:sp>
@@ -664,7 +675,7 @@
           <a:p>
             <a:fld id="{5BCAD085-E8A6-8845-BD4E-CB4CCA059FC4}" type="datetimeFigureOut">
               <a:rPr lang="en-US" smtClean="0"/>
-              <a:t>1/27/13</a:t>
+              <a:t>7/9/2026</a:t>
             </a:fld>
             <a:endParaRPr lang="en-US"/>
           </a:p>
@@ -758,10 +769,9 @@
           <a:lstStyle/>
           <a:p>
             <a:r>
-              <a:rPr lang="en-US" smtClean="0"/>
+              <a:rPr lang="en-US"/>
               <a:t>Click to edit Master title style</a:t>
             </a:r>
-            <a:endParaRPr lang="en-US"/>
           </a:p>
         </p:txBody>
       </p:sp>
@@ -782,38 +792,37 @@
           <a:p>
             <a:pPr lvl="0"/>
             <a:r>
-              <a:rPr lang="en-US" smtClean="0"/>
+              <a:rPr lang="en-US"/>
               <a:t>Click to edit Master text styles</a:t>
             </a:r>
           </a:p>
           <a:p>
             <a:pPr lvl="1"/>
             <a:r>
-              <a:rPr lang="en-US" smtClean="0"/>
+              <a:rPr lang="en-US"/>
               <a:t>Second level</a:t>
             </a:r>
           </a:p>
           <a:p>
             <a:pPr lvl="2"/>
             <a:r>
-              <a:rPr lang="en-US" smtClean="0"/>
+              <a:rPr lang="en-US"/>
               <a:t>Third level</a:t>
             </a:r>
           </a:p>
           <a:p>
             <a:pPr lvl="3"/>
             <a:r>
-              <a:rPr lang="en-US" smtClean="0"/>
+              <a:rPr lang="en-US"/>
               <a:t>Fourth level</a:t>
             </a:r>
           </a:p>
           <a:p>
             <a:pPr lvl="4"/>
             <a:r>
-              <a:rPr lang="en-US" smtClean="0"/>
+              <a:rPr lang="en-US"/>
               <a:t>Fifth level</a:t>
             </a:r>
-            <a:endParaRPr lang="en-US"/>
           </a:p>
         </p:txBody>
       </p:sp>
@@ -834,7 +843,7 @@
           <a:p>
             <a:fld id="{5BCAD085-E8A6-8845-BD4E-CB4CCA059FC4}" type="datetimeFigureOut">
               <a:rPr lang="en-US" smtClean="0"/>
-              <a:t>1/27/13</a:t>
+              <a:t>7/9/2026</a:t>
             </a:fld>
             <a:endParaRPr lang="en-US"/>
           </a:p>
@@ -937,10 +946,9 @@
           </a:lstStyle>
           <a:p>
             <a:r>
-              <a:rPr lang="en-US" smtClean="0"/>
+              <a:rPr lang="en-US"/>
               <a:t>Click to edit Master title style</a:t>
             </a:r>
-            <a:endParaRPr lang="en-US"/>
           </a:p>
         </p:txBody>
       </p:sp>
@@ -1057,7 +1065,7 @@
           <a:p>
             <a:pPr lvl="0"/>
             <a:r>
-              <a:rPr lang="en-US" smtClean="0"/>
+              <a:rPr lang="en-US"/>
               <a:t>Click to edit Master text styles</a:t>
             </a:r>
           </a:p>
@@ -1080,7 +1088,7 @@
           <a:p>
             <a:fld id="{5BCAD085-E8A6-8845-BD4E-CB4CCA059FC4}" type="datetimeFigureOut">
               <a:rPr lang="en-US" smtClean="0"/>
-              <a:t>1/27/13</a:t>
+              <a:t>7/9/2026</a:t>
             </a:fld>
             <a:endParaRPr lang="en-US"/>
           </a:p>
@@ -1174,10 +1182,9 @@
           <a:lstStyle/>
           <a:p>
             <a:r>
-              <a:rPr lang="en-US" smtClean="0"/>
+              <a:rPr lang="en-US"/>
               <a:t>Click to edit Master title style</a:t>
             </a:r>
-            <a:endParaRPr lang="en-US"/>
           </a:p>
         </p:txBody>
       </p:sp>
@@ -1231,38 +1238,37 @@
           <a:p>
             <a:pPr lvl="0"/>
             <a:r>
-              <a:rPr lang="en-US" smtClean="0"/>
+              <a:rPr lang="en-US"/>
               <a:t>Click to edit Master text styles</a:t>
             </a:r>
           </a:p>
           <a:p>
             <a:pPr lvl="1"/>
             <a:r>
-              <a:rPr lang="en-US" smtClean="0"/>
+              <a:rPr lang="en-US"/>
               <a:t>Second level</a:t>
             </a:r>
           </a:p>
           <a:p>
             <a:pPr lvl="2"/>
             <a:r>
-              <a:rPr lang="en-US" smtClean="0"/>
+              <a:rPr lang="en-US"/>
               <a:t>Third level</a:t>
             </a:r>
           </a:p>
           <a:p>
             <a:pPr lvl="3"/>
             <a:r>
-              <a:rPr lang="en-US" smtClean="0"/>
+              <a:rPr lang="en-US"/>
               <a:t>Fourth level</a:t>
             </a:r>
           </a:p>
           <a:p>
             <a:pPr lvl="4"/>
             <a:r>
-              <a:rPr lang="en-US" smtClean="0"/>
+              <a:rPr lang="en-US"/>
               <a:t>Fifth level</a:t>
             </a:r>
-            <a:endParaRPr lang="en-US"/>
           </a:p>
         </p:txBody>
       </p:sp>
@@ -1316,38 +1322,37 @@
           <a:p>
             <a:pPr lvl="0"/>
             <a:r>
-              <a:rPr lang="en-US" smtClean="0"/>
+              <a:rPr lang="en-US"/>
               <a:t>Click to edit Master text styles</a:t>
             </a:r>
           </a:p>
           <a:p>
             <a:pPr lvl="1"/>
             <a:r>
-              <a:rPr lang="en-US" smtClean="0"/>
+              <a:rPr lang="en-US"/>
               <a:t>Second level</a:t>
             </a:r>
           </a:p>
           <a:p>
             <a:pPr lvl="2"/>
             <a:r>
-              <a:rPr lang="en-US" smtClean="0"/>
+              <a:rPr lang="en-US"/>
               <a:t>Third level</a:t>
             </a:r>
           </a:p>
           <a:p>
             <a:pPr lvl="3"/>
             <a:r>
-              <a:rPr lang="en-US" smtClean="0"/>
+              <a:rPr lang="en-US"/>
               <a:t>Fourth level</a:t>
             </a:r>
           </a:p>
           <a:p>
             <a:pPr lvl="4"/>
             <a:r>
-              <a:rPr lang="en-US" smtClean="0"/>
+              <a:rPr lang="en-US"/>
               <a:t>Fifth level</a:t>
             </a:r>
-            <a:endParaRPr lang="en-US"/>
           </a:p>
         </p:txBody>
       </p:sp>
@@ -1368,7 +1373,7 @@
           <a:p>
             <a:fld id="{5BCAD085-E8A6-8845-BD4E-CB4CCA059FC4}" type="datetimeFigureOut">
               <a:rPr lang="en-US" smtClean="0"/>
-              <a:t>1/27/13</a:t>
+              <a:t>7/9/2026</a:t>
             </a:fld>
             <a:endParaRPr lang="en-US"/>
           </a:p>
@@ -1466,10 +1471,9 @@
           </a:lstStyle>
           <a:p>
             <a:r>
-              <a:rPr lang="en-US" smtClean="0"/>
+              <a:rPr lang="en-US"/>
               <a:t>Click to edit Master title style</a:t>
             </a:r>
-            <a:endParaRPr lang="en-US"/>
           </a:p>
         </p:txBody>
       </p:sp>
@@ -1532,7 +1536,7 @@
           <a:p>
             <a:pPr lvl="0"/>
             <a:r>
-              <a:rPr lang="en-US" smtClean="0"/>
+              <a:rPr lang="en-US"/>
               <a:t>Click to edit Master text styles</a:t>
             </a:r>
           </a:p>
@@ -1588,38 +1592,37 @@
           <a:p>
             <a:pPr lvl="0"/>
             <a:r>
-              <a:rPr lang="en-US" smtClean="0"/>
+              <a:rPr lang="en-US"/>
               <a:t>Click to edit Master text styles</a:t>
             </a:r>
           </a:p>
           <a:p>
             <a:pPr lvl="1"/>
             <a:r>
-              <a:rPr lang="en-US" smtClean="0"/>
+              <a:rPr lang="en-US"/>
               <a:t>Second level</a:t>
             </a:r>
           </a:p>
           <a:p>
             <a:pPr lvl="2"/>
             <a:r>
-              <a:rPr lang="en-US" smtClean="0"/>
+              <a:rPr lang="en-US"/>
               <a:t>Third level</a:t>
             </a:r>
           </a:p>
           <a:p>
             <a:pPr lvl="3"/>
             <a:r>
-              <a:rPr lang="en-US" smtClean="0"/>
+              <a:rPr lang="en-US"/>
               <a:t>Fourth level</a:t>
             </a:r>
           </a:p>
           <a:p>
             <a:pPr lvl="4"/>
             <a:r>
-              <a:rPr lang="en-US" smtClean="0"/>
+              <a:rPr lang="en-US"/>
               <a:t>Fifth level</a:t>
             </a:r>
-            <a:endParaRPr lang="en-US"/>
           </a:p>
         </p:txBody>
       </p:sp>
@@ -1682,7 +1685,7 @@
           <a:p>
             <a:pPr lvl="0"/>
             <a:r>
-              <a:rPr lang="en-US" smtClean="0"/>
+              <a:rPr lang="en-US"/>
               <a:t>Click to edit Master text styles</a:t>
             </a:r>
           </a:p>
@@ -1738,38 +1741,37 @@
           <a:p>
             <a:pPr lvl="0"/>
             <a:r>
-              <a:rPr lang="en-US" smtClean="0"/>
+              <a:rPr lang="en-US"/>
               <a:t>Click to edit Master text styles</a:t>
             </a:r>
           </a:p>
           <a:p>
             <a:pPr lvl="1"/>
             <a:r>
-              <a:rPr lang="en-US" smtClean="0"/>
+              <a:rPr lang="en-US"/>
               <a:t>Second level</a:t>
             </a:r>
           </a:p>
           <a:p>
             <a:pPr lvl="2"/>
             <a:r>
-              <a:rPr lang="en-US" smtClean="0"/>
+              <a:rPr lang="en-US"/>
               <a:t>Third level</a:t>
             </a:r>
           </a:p>
           <a:p>
             <a:pPr lvl="3"/>
             <a:r>
-              <a:rPr lang="en-US" smtClean="0"/>
+              <a:rPr lang="en-US"/>
               <a:t>Fourth level</a:t>
             </a:r>
           </a:p>
           <a:p>
             <a:pPr lvl="4"/>
             <a:r>
-              <a:rPr lang="en-US" smtClean="0"/>
+              <a:rPr lang="en-US"/>
               <a:t>Fifth level</a:t>
             </a:r>
-            <a:endParaRPr lang="en-US"/>
           </a:p>
         </p:txBody>
       </p:sp>
@@ -1790,7 +1792,7 @@
           <a:p>
             <a:fld id="{5BCAD085-E8A6-8845-BD4E-CB4CCA059FC4}" type="datetimeFigureOut">
               <a:rPr lang="en-US" smtClean="0"/>
-              <a:t>1/27/13</a:t>
+              <a:t>7/9/2026</a:t>
             </a:fld>
             <a:endParaRPr lang="en-US"/>
           </a:p>
@@ -1884,10 +1886,9 @@
           <a:lstStyle/>
           <a:p>
             <a:r>
-              <a:rPr lang="en-US" smtClean="0"/>
+              <a:rPr lang="en-US"/>
               <a:t>Click to edit Master title style</a:t>
             </a:r>
-            <a:endParaRPr lang="en-US"/>
           </a:p>
         </p:txBody>
       </p:sp>
@@ -1908,7 +1909,7 @@
           <a:p>
             <a:fld id="{5BCAD085-E8A6-8845-BD4E-CB4CCA059FC4}" type="datetimeFigureOut">
               <a:rPr lang="en-US" smtClean="0"/>
-              <a:t>1/27/13</a:t>
+              <a:t>7/9/2026</a:t>
             </a:fld>
             <a:endParaRPr lang="en-US"/>
           </a:p>
@@ -2003,7 +2004,7 @@
           <a:p>
             <a:fld id="{5BCAD085-E8A6-8845-BD4E-CB4CCA059FC4}" type="datetimeFigureOut">
               <a:rPr lang="en-US" smtClean="0"/>
-              <a:t>1/27/13</a:t>
+              <a:t>7/9/2026</a:t>
             </a:fld>
             <a:endParaRPr lang="en-US"/>
           </a:p>
@@ -2106,10 +2107,9 @@
           </a:lstStyle>
           <a:p>
             <a:r>
-              <a:rPr lang="en-US" smtClean="0"/>
+              <a:rPr lang="en-US"/>
               <a:t>Click to edit Master title style</a:t>
             </a:r>
-            <a:endParaRPr lang="en-US"/>
           </a:p>
         </p:txBody>
       </p:sp>
@@ -2163,38 +2163,37 @@
           <a:p>
             <a:pPr lvl="0"/>
             <a:r>
-              <a:rPr lang="en-US" smtClean="0"/>
+              <a:rPr lang="en-US"/>
               <a:t>Click to edit Master text styles</a:t>
             </a:r>
           </a:p>
           <a:p>
             <a:pPr lvl="1"/>
             <a:r>
-              <a:rPr lang="en-US" smtClean="0"/>
+              <a:rPr lang="en-US"/>
               <a:t>Second level</a:t>
             </a:r>
           </a:p>
           <a:p>
             <a:pPr lvl="2"/>
             <a:r>
-              <a:rPr lang="en-US" smtClean="0"/>
+              <a:rPr lang="en-US"/>
               <a:t>Third level</a:t>
             </a:r>
           </a:p>
           <a:p>
             <a:pPr lvl="3"/>
             <a:r>
-              <a:rPr lang="en-US" smtClean="0"/>
+              <a:rPr lang="en-US"/>
               <a:t>Fourth level</a:t>
             </a:r>
           </a:p>
           <a:p>
             <a:pPr lvl="4"/>
             <a:r>
-              <a:rPr lang="en-US" smtClean="0"/>
+              <a:rPr lang="en-US"/>
               <a:t>Fifth level</a:t>
             </a:r>
-            <a:endParaRPr lang="en-US"/>
           </a:p>
         </p:txBody>
       </p:sp>
@@ -2257,7 +2256,7 @@
           <a:p>
             <a:pPr lvl="0"/>
             <a:r>
-              <a:rPr lang="en-US" smtClean="0"/>
+              <a:rPr lang="en-US"/>
               <a:t>Click to edit Master text styles</a:t>
             </a:r>
           </a:p>
@@ -2280,7 +2279,7 @@
           <a:p>
             <a:fld id="{5BCAD085-E8A6-8845-BD4E-CB4CCA059FC4}" type="datetimeFigureOut">
               <a:rPr lang="en-US" smtClean="0"/>
-              <a:t>1/27/13</a:t>
+              <a:t>7/9/2026</a:t>
             </a:fld>
             <a:endParaRPr lang="en-US"/>
           </a:p>
@@ -2383,10 +2382,9 @@
           </a:lstStyle>
           <a:p>
             <a:r>
-              <a:rPr lang="en-US" smtClean="0"/>
+              <a:rPr lang="en-US"/>
               <a:t>Click to edit Master title style</a:t>
             </a:r>
-            <a:endParaRPr lang="en-US"/>
           </a:p>
         </p:txBody>
       </p:sp>
@@ -2510,7 +2508,7 @@
           <a:p>
             <a:pPr lvl="0"/>
             <a:r>
-              <a:rPr lang="en-US" smtClean="0"/>
+              <a:rPr lang="en-US"/>
               <a:t>Click to edit Master text styles</a:t>
             </a:r>
           </a:p>
@@ -2533,7 +2531,7 @@
           <a:p>
             <a:fld id="{5BCAD085-E8A6-8845-BD4E-CB4CCA059FC4}" type="datetimeFigureOut">
               <a:rPr lang="en-US" smtClean="0"/>
-              <a:t>1/27/13</a:t>
+              <a:t>7/9/2026</a:t>
             </a:fld>
             <a:endParaRPr lang="en-US"/>
           </a:p>
@@ -2642,10 +2640,9 @@
           <a:lstStyle/>
           <a:p>
             <a:r>
-              <a:rPr lang="en-US" smtClean="0"/>
+              <a:rPr lang="en-US"/>
               <a:t>Click to edit Master title style</a:t>
             </a:r>
-            <a:endParaRPr lang="en-US"/>
           </a:p>
         </p:txBody>
       </p:sp>
@@ -2676,38 +2673,37 @@
           <a:p>
             <a:pPr lvl="0"/>
             <a:r>
-              <a:rPr lang="en-US" smtClean="0"/>
+              <a:rPr lang="en-US"/>
               <a:t>Click to edit Master text styles</a:t>
             </a:r>
           </a:p>
           <a:p>
             <a:pPr lvl="1"/>
             <a:r>
-              <a:rPr lang="en-US" smtClean="0"/>
+              <a:rPr lang="en-US"/>
               <a:t>Second level</a:t>
             </a:r>
           </a:p>
           <a:p>
             <a:pPr lvl="2"/>
             <a:r>
-              <a:rPr lang="en-US" smtClean="0"/>
+              <a:rPr lang="en-US"/>
               <a:t>Third level</a:t>
             </a:r>
           </a:p>
           <a:p>
             <a:pPr lvl="3"/>
             <a:r>
-              <a:rPr lang="en-US" smtClean="0"/>
+              <a:rPr lang="en-US"/>
               <a:t>Fourth level</a:t>
             </a:r>
           </a:p>
           <a:p>
             <a:pPr lvl="4"/>
             <a:r>
-              <a:rPr lang="en-US" smtClean="0"/>
+              <a:rPr lang="en-US"/>
               <a:t>Fifth level</a:t>
             </a:r>
-            <a:endParaRPr lang="en-US"/>
           </a:p>
         </p:txBody>
       </p:sp>
@@ -2746,7 +2742,7 @@
           <a:p>
             <a:fld id="{5BCAD085-E8A6-8845-BD4E-CB4CCA059FC4}" type="datetimeFigureOut">
               <a:rPr lang="en-US" smtClean="0"/>
-              <a:t>1/27/13</a:t>
+              <a:t>7/9/2026</a:t>
             </a:fld>
             <a:endParaRPr lang="en-US"/>
           </a:p>
@@ -3105,7 +3101,7 @@
 </file>
 
 <file path=ppt/slides/slide1.xml><?xml version="1.0" encoding="utf-8"?>
-<p:sld xmlns:a="http://schemas.openxmlformats.org/drawingml/2006/main" xmlns:p="http://schemas.openxmlformats.org/presentationml/2006/main" xmlns:r="http://schemas.openxmlformats.org/officeDocument/2006/relationships">
+<p:sld xmlns:a="http://schemas.openxmlformats.org/drawingml/2006/main" xmlns:r="http://schemas.openxmlformats.org/officeDocument/2006/relationships" xmlns:p="http://schemas.openxmlformats.org/presentationml/2006/main">
   <p:cSld>
     <p:spTree>
       <p:nvGrpSpPr>
@@ -3113,7 +3109,14 @@
         <p:cNvGrpSpPr/>
         <p:nvPr/>
       </p:nvGrpSpPr>
-      <p:grpSpPr/>
+      <p:grpSpPr>
+        <a:xfrm>
+          <a:off x="0" y="0"/>
+          <a:ext cx="0" cy="0"/>
+          <a:chOff x="0" y="0"/>
+          <a:chExt cx="0" cy="0"/>
+        </a:xfrm>
+      </p:grpSpPr>
       <p:sp>
         <p:nvSpPr>
           <p:cNvPr id="2" name="Rectangle 1"/>
@@ -3155,6 +3158,7 @@
           <a:lstStyle/>
           <a:p>
             <a:pPr algn="ctr"/>
+            <a:endParaRPr/>
           </a:p>
         </p:txBody>
       </p:sp>
@@ -3199,6 +3203,7 @@
           <a:lstStyle/>
           <a:p>
             <a:pPr algn="ctr"/>
+            <a:endParaRPr/>
           </a:p>
         </p:txBody>
       </p:sp>
@@ -3243,6 +3248,7 @@
           <a:lstStyle/>
           <a:p>
             <a:pPr algn="ctr"/>
+            <a:endParaRPr/>
           </a:p>
         </p:txBody>
       </p:sp>
@@ -3413,6 +3419,7 @@
           <a:lstStyle/>
           <a:p>
             <a:pPr algn="ctr"/>
+            <a:endParaRPr/>
           </a:p>
         </p:txBody>
       </p:sp>
@@ -3529,6 +3536,43 @@
                   <a:srgbClr val="64748B"/>
                 </a:solidFill>
                 <a:latin typeface="맑은 고딕"/>
+              </a:rPr>
+              <a:t>AURIX</a:t>
+            </a:r>
+          </a:p>
+        </p:txBody>
+      </p:sp>
+      <p:sp>
+        <p:nvSpPr>
+          <p:cNvPr id="90001" name="Watermark AURIX"/>
+          <p:cNvSpPr txBox="1"/>
+          <p:nvPr userDrawn="1"/>
+        </p:nvSpPr>
+        <p:spPr>
+          <a:xfrm rot="18300000">
+            <a:off x="2596000" y="2529000"/>
+            <a:ext cx="7000000" cy="1800000"/>
+          </a:xfrm>
+          <a:prstGeom prst="rect">
+            <a:avLst/>
+          </a:prstGeom>
+          <a:noFill/>
+        </p:spPr>
+        <p:txBody>
+          <a:bodyPr wrap="square" anchor="ctr" anchorCtr="1">
+            <a:noAutofit/>
+          </a:bodyPr>
+          <a:lstStyle/>
+          <a:p>
+            <a:pPr algn="ctr"/>
+            <a:r>
+              <a:rPr lang="en-US" sz="8000" b="1">
+                <a:solidFill>
+                  <a:srgbClr val="808080">
+                    <a:alpha val="25000"/>
+                  </a:srgbClr>
+                </a:solidFill>
+                <a:latin typeface="Arial"/>
               </a:rPr>
               <a:t>AURIX</a:t>
             </a:r>
@@ -3544,7 +3588,7 @@
 </file>
 
 <file path=ppt/slides/slide10.xml><?xml version="1.0" encoding="utf-8"?>
-<p:sld xmlns:a="http://schemas.openxmlformats.org/drawingml/2006/main" xmlns:p="http://schemas.openxmlformats.org/presentationml/2006/main" xmlns:r="http://schemas.openxmlformats.org/officeDocument/2006/relationships">
+<p:sld xmlns:a="http://schemas.openxmlformats.org/drawingml/2006/main" xmlns:r="http://schemas.openxmlformats.org/officeDocument/2006/relationships" xmlns:p="http://schemas.openxmlformats.org/presentationml/2006/main">
   <p:cSld>
     <p:spTree>
       <p:nvGrpSpPr>
@@ -3552,7 +3596,14 @@
         <p:cNvGrpSpPr/>
         <p:nvPr/>
       </p:nvGrpSpPr>
-      <p:grpSpPr/>
+      <p:grpSpPr>
+        <a:xfrm>
+          <a:off x="0" y="0"/>
+          <a:ext cx="0" cy="0"/>
+          <a:chOff x="0" y="0"/>
+          <a:chExt cx="0" cy="0"/>
+        </a:xfrm>
+      </p:grpSpPr>
       <p:sp>
         <p:nvSpPr>
           <p:cNvPr id="2" name="Rectangle 1"/>
@@ -3594,6 +3645,7 @@
           <a:lstStyle/>
           <a:p>
             <a:pPr algn="ctr"/>
+            <a:endParaRPr/>
           </a:p>
         </p:txBody>
       </p:sp>
@@ -3722,6 +3774,7 @@
           <a:lstStyle/>
           <a:p>
             <a:pPr algn="ctr"/>
+            <a:endParaRPr/>
           </a:p>
         </p:txBody>
       </p:sp>
@@ -3790,6 +3843,7 @@
           <a:lstStyle/>
           <a:p>
             <a:pPr algn="ctr"/>
+            <a:endParaRPr/>
           </a:p>
         </p:txBody>
       </p:sp>
@@ -4069,6 +4123,43 @@
                   <a:srgbClr val="64748B"/>
                 </a:solidFill>
                 <a:latin typeface="맑은 고딕"/>
+              </a:rPr>
+              <a:t>AURIX</a:t>
+            </a:r>
+          </a:p>
+        </p:txBody>
+      </p:sp>
+      <p:sp>
+        <p:nvSpPr>
+          <p:cNvPr id="90001" name="Watermark AURIX"/>
+          <p:cNvSpPr txBox="1"/>
+          <p:nvPr userDrawn="1"/>
+        </p:nvSpPr>
+        <p:spPr>
+          <a:xfrm rot="18300000">
+            <a:off x="2596000" y="2529000"/>
+            <a:ext cx="7000000" cy="1800000"/>
+          </a:xfrm>
+          <a:prstGeom prst="rect">
+            <a:avLst/>
+          </a:prstGeom>
+          <a:noFill/>
+        </p:spPr>
+        <p:txBody>
+          <a:bodyPr wrap="square" anchor="ctr" anchorCtr="1">
+            <a:noAutofit/>
+          </a:bodyPr>
+          <a:lstStyle/>
+          <a:p>
+            <a:pPr algn="ctr"/>
+            <a:r>
+              <a:rPr lang="en-US" sz="8000" b="1">
+                <a:solidFill>
+                  <a:srgbClr val="808080">
+                    <a:alpha val="25000"/>
+                  </a:srgbClr>
+                </a:solidFill>
+                <a:latin typeface="Arial"/>
               </a:rPr>
               <a:t>AURIX</a:t>
             </a:r>
@@ -4084,7 +4175,7 @@
 </file>
 
 <file path=ppt/slides/slide11.xml><?xml version="1.0" encoding="utf-8"?>
-<p:sld xmlns:a="http://schemas.openxmlformats.org/drawingml/2006/main" xmlns:p="http://schemas.openxmlformats.org/presentationml/2006/main" xmlns:r="http://schemas.openxmlformats.org/officeDocument/2006/relationships">
+<p:sld xmlns:a="http://schemas.openxmlformats.org/drawingml/2006/main" xmlns:r="http://schemas.openxmlformats.org/officeDocument/2006/relationships" xmlns:p="http://schemas.openxmlformats.org/presentationml/2006/main">
   <p:cSld>
     <p:spTree>
       <p:nvGrpSpPr>
@@ -4092,7 +4183,14 @@
         <p:cNvGrpSpPr/>
         <p:nvPr/>
       </p:nvGrpSpPr>
-      <p:grpSpPr/>
+      <p:grpSpPr>
+        <a:xfrm>
+          <a:off x="0" y="0"/>
+          <a:ext cx="0" cy="0"/>
+          <a:chOff x="0" y="0"/>
+          <a:chExt cx="0" cy="0"/>
+        </a:xfrm>
+      </p:grpSpPr>
       <p:sp>
         <p:nvSpPr>
           <p:cNvPr id="2" name="Rectangle 1"/>
@@ -4134,6 +4232,7 @@
           <a:lstStyle/>
           <a:p>
             <a:pPr algn="ctr"/>
+            <a:endParaRPr/>
           </a:p>
         </p:txBody>
       </p:sp>
@@ -4262,6 +4361,7 @@
           <a:lstStyle/>
           <a:p>
             <a:pPr algn="ctr"/>
+            <a:endParaRPr/>
           </a:p>
         </p:txBody>
       </p:sp>
@@ -4330,6 +4430,7 @@
           <a:lstStyle/>
           <a:p>
             <a:pPr algn="ctr"/>
+            <a:endParaRPr/>
           </a:p>
         </p:txBody>
       </p:sp>
@@ -4553,6 +4654,43 @@
                   <a:srgbClr val="64748B"/>
                 </a:solidFill>
                 <a:latin typeface="맑은 고딕"/>
+              </a:rPr>
+              <a:t>AURIX</a:t>
+            </a:r>
+          </a:p>
+        </p:txBody>
+      </p:sp>
+      <p:sp>
+        <p:nvSpPr>
+          <p:cNvPr id="90001" name="Watermark AURIX"/>
+          <p:cNvSpPr txBox="1"/>
+          <p:nvPr userDrawn="1"/>
+        </p:nvSpPr>
+        <p:spPr>
+          <a:xfrm rot="18300000">
+            <a:off x="2596000" y="2529000"/>
+            <a:ext cx="7000000" cy="1800000"/>
+          </a:xfrm>
+          <a:prstGeom prst="rect">
+            <a:avLst/>
+          </a:prstGeom>
+          <a:noFill/>
+        </p:spPr>
+        <p:txBody>
+          <a:bodyPr wrap="square" anchor="ctr" anchorCtr="1">
+            <a:noAutofit/>
+          </a:bodyPr>
+          <a:lstStyle/>
+          <a:p>
+            <a:pPr algn="ctr"/>
+            <a:r>
+              <a:rPr lang="en-US" sz="8000" b="1">
+                <a:solidFill>
+                  <a:srgbClr val="808080">
+                    <a:alpha val="25000"/>
+                  </a:srgbClr>
+                </a:solidFill>
+                <a:latin typeface="Arial"/>
               </a:rPr>
               <a:t>AURIX</a:t>
             </a:r>
@@ -4568,7 +4706,7 @@
 </file>
 
 <file path=ppt/slides/slide12.xml><?xml version="1.0" encoding="utf-8"?>
-<p:sld xmlns:a="http://schemas.openxmlformats.org/drawingml/2006/main" xmlns:p="http://schemas.openxmlformats.org/presentationml/2006/main" xmlns:r="http://schemas.openxmlformats.org/officeDocument/2006/relationships">
+<p:sld xmlns:a="http://schemas.openxmlformats.org/drawingml/2006/main" xmlns:r="http://schemas.openxmlformats.org/officeDocument/2006/relationships" xmlns:p="http://schemas.openxmlformats.org/presentationml/2006/main">
   <p:cSld>
     <p:spTree>
       <p:nvGrpSpPr>
@@ -4576,7 +4714,14 @@
         <p:cNvGrpSpPr/>
         <p:nvPr/>
       </p:nvGrpSpPr>
-      <p:grpSpPr/>
+      <p:grpSpPr>
+        <a:xfrm>
+          <a:off x="0" y="0"/>
+          <a:ext cx="0" cy="0"/>
+          <a:chOff x="0" y="0"/>
+          <a:chExt cx="0" cy="0"/>
+        </a:xfrm>
+      </p:grpSpPr>
       <p:sp>
         <p:nvSpPr>
           <p:cNvPr id="2" name="Rectangle 1"/>
@@ -4618,6 +4763,7 @@
           <a:lstStyle/>
           <a:p>
             <a:pPr algn="ctr"/>
+            <a:endParaRPr/>
           </a:p>
         </p:txBody>
       </p:sp>
@@ -4746,6 +4892,7 @@
           <a:lstStyle/>
           <a:p>
             <a:pPr algn="ctr"/>
+            <a:endParaRPr/>
           </a:p>
         </p:txBody>
       </p:sp>
@@ -4997,6 +5144,43 @@
                   <a:srgbClr val="64748B"/>
                 </a:solidFill>
                 <a:latin typeface="맑은 고딕"/>
+              </a:rPr>
+              <a:t>AURIX</a:t>
+            </a:r>
+          </a:p>
+        </p:txBody>
+      </p:sp>
+      <p:sp>
+        <p:nvSpPr>
+          <p:cNvPr id="90001" name="Watermark AURIX"/>
+          <p:cNvSpPr txBox="1"/>
+          <p:nvPr userDrawn="1"/>
+        </p:nvSpPr>
+        <p:spPr>
+          <a:xfrm rot="18300000">
+            <a:off x="2596000" y="2529000"/>
+            <a:ext cx="7000000" cy="1800000"/>
+          </a:xfrm>
+          <a:prstGeom prst="rect">
+            <a:avLst/>
+          </a:prstGeom>
+          <a:noFill/>
+        </p:spPr>
+        <p:txBody>
+          <a:bodyPr wrap="square" anchor="ctr" anchorCtr="1">
+            <a:noAutofit/>
+          </a:bodyPr>
+          <a:lstStyle/>
+          <a:p>
+            <a:pPr algn="ctr"/>
+            <a:r>
+              <a:rPr lang="en-US" sz="8000" b="1">
+                <a:solidFill>
+                  <a:srgbClr val="808080">
+                    <a:alpha val="25000"/>
+                  </a:srgbClr>
+                </a:solidFill>
+                <a:latin typeface="Arial"/>
               </a:rPr>
               <a:t>AURIX</a:t>
             </a:r>
@@ -5012,7 +5196,7 @@
 </file>
 
 <file path=ppt/slides/slide13.xml><?xml version="1.0" encoding="utf-8"?>
-<p:sld xmlns:a="http://schemas.openxmlformats.org/drawingml/2006/main" xmlns:p="http://schemas.openxmlformats.org/presentationml/2006/main" xmlns:r="http://schemas.openxmlformats.org/officeDocument/2006/relationships">
+<p:sld xmlns:a="http://schemas.openxmlformats.org/drawingml/2006/main" xmlns:r="http://schemas.openxmlformats.org/officeDocument/2006/relationships" xmlns:p="http://schemas.openxmlformats.org/presentationml/2006/main">
   <p:cSld>
     <p:spTree>
       <p:nvGrpSpPr>
@@ -5020,7 +5204,14 @@
         <p:cNvGrpSpPr/>
         <p:nvPr/>
       </p:nvGrpSpPr>
-      <p:grpSpPr/>
+      <p:grpSpPr>
+        <a:xfrm>
+          <a:off x="0" y="0"/>
+          <a:ext cx="0" cy="0"/>
+          <a:chOff x="0" y="0"/>
+          <a:chExt cx="0" cy="0"/>
+        </a:xfrm>
+      </p:grpSpPr>
       <p:sp>
         <p:nvSpPr>
           <p:cNvPr id="2" name="Rectangle 1"/>
@@ -5062,6 +5253,7 @@
           <a:lstStyle/>
           <a:p>
             <a:pPr algn="ctr"/>
+            <a:endParaRPr/>
           </a:p>
         </p:txBody>
       </p:sp>
@@ -5190,6 +5382,7 @@
           <a:lstStyle/>
           <a:p>
             <a:pPr algn="ctr"/>
+            <a:endParaRPr/>
           </a:p>
         </p:txBody>
       </p:sp>
@@ -5441,6 +5634,43 @@
                   <a:srgbClr val="64748B"/>
                 </a:solidFill>
                 <a:latin typeface="맑은 고딕"/>
+              </a:rPr>
+              <a:t>AURIX</a:t>
+            </a:r>
+          </a:p>
+        </p:txBody>
+      </p:sp>
+      <p:sp>
+        <p:nvSpPr>
+          <p:cNvPr id="90001" name="Watermark AURIX"/>
+          <p:cNvSpPr txBox="1"/>
+          <p:nvPr userDrawn="1"/>
+        </p:nvSpPr>
+        <p:spPr>
+          <a:xfrm rot="18300000">
+            <a:off x="2596000" y="2529000"/>
+            <a:ext cx="7000000" cy="1800000"/>
+          </a:xfrm>
+          <a:prstGeom prst="rect">
+            <a:avLst/>
+          </a:prstGeom>
+          <a:noFill/>
+        </p:spPr>
+        <p:txBody>
+          <a:bodyPr wrap="square" anchor="ctr" anchorCtr="1">
+            <a:noAutofit/>
+          </a:bodyPr>
+          <a:lstStyle/>
+          <a:p>
+            <a:pPr algn="ctr"/>
+            <a:r>
+              <a:rPr lang="en-US" sz="8000" b="1">
+                <a:solidFill>
+                  <a:srgbClr val="808080">
+                    <a:alpha val="25000"/>
+                  </a:srgbClr>
+                </a:solidFill>
+                <a:latin typeface="Arial"/>
               </a:rPr>
               <a:t>AURIX</a:t>
             </a:r>
@@ -5456,7 +5686,7 @@
 </file>
 
 <file path=ppt/slides/slide14.xml><?xml version="1.0" encoding="utf-8"?>
-<p:sld xmlns:a="http://schemas.openxmlformats.org/drawingml/2006/main" xmlns:p="http://schemas.openxmlformats.org/presentationml/2006/main" xmlns:r="http://schemas.openxmlformats.org/officeDocument/2006/relationships">
+<p:sld xmlns:a="http://schemas.openxmlformats.org/drawingml/2006/main" xmlns:r="http://schemas.openxmlformats.org/officeDocument/2006/relationships" xmlns:p="http://schemas.openxmlformats.org/presentationml/2006/main">
   <p:cSld>
     <p:spTree>
       <p:nvGrpSpPr>
@@ -5464,7 +5694,14 @@
         <p:cNvGrpSpPr/>
         <p:nvPr/>
       </p:nvGrpSpPr>
-      <p:grpSpPr/>
+      <p:grpSpPr>
+        <a:xfrm>
+          <a:off x="0" y="0"/>
+          <a:ext cx="0" cy="0"/>
+          <a:chOff x="0" y="0"/>
+          <a:chExt cx="0" cy="0"/>
+        </a:xfrm>
+      </p:grpSpPr>
       <p:sp>
         <p:nvSpPr>
           <p:cNvPr id="2" name="Rectangle 1"/>
@@ -5506,6 +5743,7 @@
           <a:lstStyle/>
           <a:p>
             <a:pPr algn="ctr"/>
+            <a:endParaRPr/>
           </a:p>
         </p:txBody>
       </p:sp>
@@ -5634,6 +5872,7 @@
           <a:lstStyle/>
           <a:p>
             <a:pPr algn="ctr"/>
+            <a:endParaRPr/>
           </a:p>
         </p:txBody>
       </p:sp>
@@ -5682,6 +5921,7 @@
           <a:lstStyle/>
           <a:p>
             <a:pPr algn="ctr"/>
+            <a:endParaRPr/>
           </a:p>
         </p:txBody>
       </p:sp>
@@ -5776,6 +6016,22 @@
                 <a:spcPts val="600"/>
               </a:spcAft>
             </a:pPr>
+            <a:endParaRPr sz="1250" b="0">
+              <a:solidFill>
+                <a:srgbClr val="64748B"/>
+              </a:solidFill>
+              <a:latin typeface="맑은 고딕"/>
+            </a:endParaRPr>
+          </a:p>
+          <a:p>
+            <a:pPr algn="l">
+              <a:lnSpc>
+                <a:spcPct val="125000"/>
+              </a:lnSpc>
+              <a:spcAft>
+                <a:spcPts val="600"/>
+              </a:spcAft>
+            </a:pPr>
             <a:r>
               <a:rPr sz="1250" b="0">
                 <a:solidFill>
@@ -5783,7 +6039,7 @@
                 </a:solidFill>
                 <a:latin typeface="맑은 고딕"/>
               </a:rPr>
-              <a:t/>
+              <a:t>launch/dashboard_bringup.launch.py를 호출해</a:t>
             </a:r>
           </a:p>
           <a:p>
@@ -5802,7 +6058,7 @@
                 </a:solidFill>
                 <a:latin typeface="맑은 고딕"/>
               </a:rPr>
-              <a:t>launch/dashboard_bringup.launch.py를 호출해</a:t>
+              <a:t>Nav2(turtlebot3_navigation2)를 먼저 띄우고</a:t>
             </a:r>
           </a:p>
           <a:p>
@@ -5821,7 +6077,7 @@
                 </a:solidFill>
                 <a:latin typeface="맑은 고딕"/>
               </a:rPr>
-              <a:t>Nav2(turtlebot3_navigation2)를 먼저 띄우고</a:t>
+              <a:t>몇 초 뒤 대시보드를 자동으로 함께 실행합니다.</a:t>
             </a:r>
           </a:p>
           <a:p>
@@ -5833,34 +6089,12 @@
                 <a:spcPts val="600"/>
               </a:spcAft>
             </a:pPr>
-            <a:r>
-              <a:rPr sz="1250" b="0">
-                <a:solidFill>
-                  <a:srgbClr val="64748B"/>
-                </a:solidFill>
-                <a:latin typeface="맑은 고딕"/>
-              </a:rPr>
-              <a:t>몇 초 뒤 대시보드를 자동으로 함께 실행합니다.</a:t>
-            </a:r>
-          </a:p>
-          <a:p>
-            <a:pPr algn="l">
-              <a:lnSpc>
-                <a:spcPct val="125000"/>
-              </a:lnSpc>
-              <a:spcAft>
-                <a:spcPts val="600"/>
-              </a:spcAft>
-            </a:pPr>
-            <a:r>
-              <a:rPr sz="1250" b="0">
-                <a:solidFill>
-                  <a:srgbClr val="64748B"/>
-                </a:solidFill>
-                <a:latin typeface="맑은 고딕"/>
-              </a:rPr>
-              <a:t/>
-            </a:r>
+            <a:endParaRPr sz="1250" b="0">
+              <a:solidFill>
+                <a:srgbClr val="64748B"/>
+              </a:solidFill>
+              <a:latin typeface="맑은 고딕"/>
+            </a:endParaRPr>
           </a:p>
           <a:p>
             <a:pPr algn="l">
@@ -5966,6 +6200,7 @@
           <a:lstStyle/>
           <a:p>
             <a:pPr algn="ctr"/>
+            <a:endParaRPr/>
           </a:p>
         </p:txBody>
       </p:sp>
@@ -6060,6 +6295,22 @@
                 <a:spcPts val="600"/>
               </a:spcAft>
             </a:pPr>
+            <a:endParaRPr sz="1250" b="0">
+              <a:solidFill>
+                <a:srgbClr val="64748B"/>
+              </a:solidFill>
+              <a:latin typeface="맑은 고딕"/>
+            </a:endParaRPr>
+          </a:p>
+          <a:p>
+            <a:pPr algn="l">
+              <a:lnSpc>
+                <a:spcPct val="125000"/>
+              </a:lnSpc>
+              <a:spcAft>
+                <a:spcPts val="600"/>
+              </a:spcAft>
+            </a:pPr>
             <a:r>
               <a:rPr sz="1250" b="0">
                 <a:solidFill>
@@ -6067,7 +6318,7 @@
                 </a:solidFill>
                 <a:latin typeface="맑은 고딕"/>
               </a:rPr>
-              <a:t/>
+              <a:t>Nav2가 이미 별도로 떠 있거나, 웨이포인트</a:t>
             </a:r>
           </a:p>
           <a:p>
@@ -6086,7 +6337,7 @@
                 </a:solidFill>
                 <a:latin typeface="맑은 고딕"/>
               </a:rPr>
-              <a:t>Nav2가 이미 별도로 떠 있거나, 웨이포인트</a:t>
+              <a:t>주행 없이 모니터링/수동 조작만 쓸 때 사용합니다.</a:t>
             </a:r>
           </a:p>
           <a:p>
@@ -6098,34 +6349,12 @@
                 <a:spcPts val="600"/>
               </a:spcAft>
             </a:pPr>
-            <a:r>
-              <a:rPr sz="1250" b="0">
-                <a:solidFill>
-                  <a:srgbClr val="64748B"/>
-                </a:solidFill>
-                <a:latin typeface="맑은 고딕"/>
-              </a:rPr>
-              <a:t>주행 없이 모니터링/수동 조작만 쓸 때 사용합니다.</a:t>
-            </a:r>
-          </a:p>
-          <a:p>
-            <a:pPr algn="l">
-              <a:lnSpc>
-                <a:spcPct val="125000"/>
-              </a:lnSpc>
-              <a:spcAft>
-                <a:spcPts val="600"/>
-              </a:spcAft>
-            </a:pPr>
-            <a:r>
-              <a:rPr sz="1250" b="0">
-                <a:solidFill>
-                  <a:srgbClr val="64748B"/>
-                </a:solidFill>
-                <a:latin typeface="맑은 고딕"/>
-              </a:rPr>
-              <a:t/>
-            </a:r>
+            <a:endParaRPr sz="1250" b="0">
+              <a:solidFill>
+                <a:srgbClr val="64748B"/>
+              </a:solidFill>
+              <a:latin typeface="맑은 고딕"/>
+            </a:endParaRPr>
           </a:p>
           <a:p>
             <a:pPr algn="l">
@@ -6299,6 +6528,43 @@
                   <a:srgbClr val="64748B"/>
                 </a:solidFill>
                 <a:latin typeface="맑은 고딕"/>
+              </a:rPr>
+              <a:t>AURIX</a:t>
+            </a:r>
+          </a:p>
+        </p:txBody>
+      </p:sp>
+      <p:sp>
+        <p:nvSpPr>
+          <p:cNvPr id="90001" name="Watermark AURIX"/>
+          <p:cNvSpPr txBox="1"/>
+          <p:nvPr userDrawn="1"/>
+        </p:nvSpPr>
+        <p:spPr>
+          <a:xfrm rot="18300000">
+            <a:off x="2596000" y="2529000"/>
+            <a:ext cx="7000000" cy="1800000"/>
+          </a:xfrm>
+          <a:prstGeom prst="rect">
+            <a:avLst/>
+          </a:prstGeom>
+          <a:noFill/>
+        </p:spPr>
+        <p:txBody>
+          <a:bodyPr wrap="square" anchor="ctr" anchorCtr="1">
+            <a:noAutofit/>
+          </a:bodyPr>
+          <a:lstStyle/>
+          <a:p>
+            <a:pPr algn="ctr"/>
+            <a:r>
+              <a:rPr lang="en-US" sz="8000" b="1">
+                <a:solidFill>
+                  <a:srgbClr val="808080">
+                    <a:alpha val="25000"/>
+                  </a:srgbClr>
+                </a:solidFill>
+                <a:latin typeface="Arial"/>
               </a:rPr>
               <a:t>AURIX</a:t>
             </a:r>
@@ -6314,7 +6580,7 @@
 </file>
 
 <file path=ppt/slides/slide15.xml><?xml version="1.0" encoding="utf-8"?>
-<p:sld xmlns:a="http://schemas.openxmlformats.org/drawingml/2006/main" xmlns:p="http://schemas.openxmlformats.org/presentationml/2006/main" xmlns:r="http://schemas.openxmlformats.org/officeDocument/2006/relationships">
+<p:sld xmlns:a="http://schemas.openxmlformats.org/drawingml/2006/main" xmlns:r="http://schemas.openxmlformats.org/officeDocument/2006/relationships" xmlns:p="http://schemas.openxmlformats.org/presentationml/2006/main">
   <p:cSld>
     <p:spTree>
       <p:nvGrpSpPr>
@@ -6322,7 +6588,14 @@
         <p:cNvGrpSpPr/>
         <p:nvPr/>
       </p:nvGrpSpPr>
-      <p:grpSpPr/>
+      <p:grpSpPr>
+        <a:xfrm>
+          <a:off x="0" y="0"/>
+          <a:ext cx="0" cy="0"/>
+          <a:chOff x="0" y="0"/>
+          <a:chExt cx="0" cy="0"/>
+        </a:xfrm>
+      </p:grpSpPr>
       <p:sp>
         <p:nvSpPr>
           <p:cNvPr id="2" name="Rectangle 1"/>
@@ -6364,6 +6637,7 @@
           <a:lstStyle/>
           <a:p>
             <a:pPr algn="ctr"/>
+            <a:endParaRPr/>
           </a:p>
         </p:txBody>
       </p:sp>
@@ -6492,6 +6766,7 @@
           <a:lstStyle/>
           <a:p>
             <a:pPr algn="ctr"/>
+            <a:endParaRPr/>
           </a:p>
         </p:txBody>
       </p:sp>
@@ -6540,6 +6815,7 @@
           <a:lstStyle/>
           <a:p>
             <a:pPr algn="ctr"/>
+            <a:endParaRPr/>
           </a:p>
         </p:txBody>
       </p:sp>
@@ -6668,6 +6944,7 @@
           <a:lstStyle/>
           <a:p>
             <a:pPr algn="ctr"/>
+            <a:endParaRPr/>
           </a:p>
         </p:txBody>
       </p:sp>
@@ -6716,6 +6993,7 @@
           <a:lstStyle/>
           <a:p>
             <a:pPr algn="ctr"/>
+            <a:endParaRPr/>
           </a:p>
         </p:txBody>
       </p:sp>
@@ -6844,6 +7122,7 @@
           <a:lstStyle/>
           <a:p>
             <a:pPr algn="ctr"/>
+            <a:endParaRPr/>
           </a:p>
         </p:txBody>
       </p:sp>
@@ -6892,6 +7171,7 @@
           <a:lstStyle/>
           <a:p>
             <a:pPr algn="ctr"/>
+            <a:endParaRPr/>
           </a:p>
         </p:txBody>
       </p:sp>
@@ -7039,6 +7319,7 @@
           <a:lstStyle/>
           <a:p>
             <a:pPr algn="ctr"/>
+            <a:endParaRPr/>
           </a:p>
         </p:txBody>
       </p:sp>
@@ -7087,6 +7368,7 @@
           <a:lstStyle/>
           <a:p>
             <a:pPr algn="ctr"/>
+            <a:endParaRPr/>
           </a:p>
         </p:txBody>
       </p:sp>
@@ -7215,6 +7497,7 @@
           <a:lstStyle/>
           <a:p>
             <a:pPr algn="ctr"/>
+            <a:endParaRPr/>
           </a:p>
         </p:txBody>
       </p:sp>
@@ -7263,6 +7546,7 @@
           <a:lstStyle/>
           <a:p>
             <a:pPr algn="ctr"/>
+            <a:endParaRPr/>
           </a:p>
         </p:txBody>
       </p:sp>
@@ -7581,6 +7865,43 @@
                   <a:srgbClr val="64748B"/>
                 </a:solidFill>
                 <a:latin typeface="맑은 고딕"/>
+              </a:rPr>
+              <a:t>AURIX</a:t>
+            </a:r>
+          </a:p>
+        </p:txBody>
+      </p:sp>
+      <p:sp>
+        <p:nvSpPr>
+          <p:cNvPr id="90001" name="Watermark AURIX"/>
+          <p:cNvSpPr txBox="1"/>
+          <p:nvPr userDrawn="1"/>
+        </p:nvSpPr>
+        <p:spPr>
+          <a:xfrm rot="18300000">
+            <a:off x="2596000" y="2529000"/>
+            <a:ext cx="7000000" cy="1800000"/>
+          </a:xfrm>
+          <a:prstGeom prst="rect">
+            <a:avLst/>
+          </a:prstGeom>
+          <a:noFill/>
+        </p:spPr>
+        <p:txBody>
+          <a:bodyPr wrap="square" anchor="ctr" anchorCtr="1">
+            <a:noAutofit/>
+          </a:bodyPr>
+          <a:lstStyle/>
+          <a:p>
+            <a:pPr algn="ctr"/>
+            <a:r>
+              <a:rPr lang="en-US" sz="8000" b="1">
+                <a:solidFill>
+                  <a:srgbClr val="808080">
+                    <a:alpha val="25000"/>
+                  </a:srgbClr>
+                </a:solidFill>
+                <a:latin typeface="Arial"/>
               </a:rPr>
               <a:t>AURIX</a:t>
             </a:r>
@@ -7596,7 +7917,7 @@
 </file>
 
 <file path=ppt/slides/slide16.xml><?xml version="1.0" encoding="utf-8"?>
-<p:sld xmlns:a="http://schemas.openxmlformats.org/drawingml/2006/main" xmlns:p="http://schemas.openxmlformats.org/presentationml/2006/main" xmlns:r="http://schemas.openxmlformats.org/officeDocument/2006/relationships">
+<p:sld xmlns:a="http://schemas.openxmlformats.org/drawingml/2006/main" xmlns:r="http://schemas.openxmlformats.org/officeDocument/2006/relationships" xmlns:p="http://schemas.openxmlformats.org/presentationml/2006/main">
   <p:cSld>
     <p:spTree>
       <p:nvGrpSpPr>
@@ -7604,7 +7925,14 @@
         <p:cNvGrpSpPr/>
         <p:nvPr/>
       </p:nvGrpSpPr>
-      <p:grpSpPr/>
+      <p:grpSpPr>
+        <a:xfrm>
+          <a:off x="0" y="0"/>
+          <a:ext cx="0" cy="0"/>
+          <a:chOff x="0" y="0"/>
+          <a:chExt cx="0" cy="0"/>
+        </a:xfrm>
+      </p:grpSpPr>
       <p:sp>
         <p:nvSpPr>
           <p:cNvPr id="2" name="Rectangle 1"/>
@@ -7646,6 +7974,7 @@
           <a:lstStyle/>
           <a:p>
             <a:pPr algn="ctr"/>
+            <a:endParaRPr/>
           </a:p>
         </p:txBody>
       </p:sp>
@@ -7774,6 +8103,7 @@
           <a:lstStyle/>
           <a:p>
             <a:pPr algn="ctr"/>
+            <a:endParaRPr/>
           </a:p>
         </p:txBody>
       </p:sp>
@@ -8067,6 +8397,43 @@
                   <a:srgbClr val="64748B"/>
                 </a:solidFill>
                 <a:latin typeface="맑은 고딕"/>
+              </a:rPr>
+              <a:t>AURIX</a:t>
+            </a:r>
+          </a:p>
+        </p:txBody>
+      </p:sp>
+      <p:sp>
+        <p:nvSpPr>
+          <p:cNvPr id="90001" name="Watermark AURIX"/>
+          <p:cNvSpPr txBox="1"/>
+          <p:nvPr userDrawn="1"/>
+        </p:nvSpPr>
+        <p:spPr>
+          <a:xfrm rot="18300000">
+            <a:off x="2596000" y="2529000"/>
+            <a:ext cx="7000000" cy="1800000"/>
+          </a:xfrm>
+          <a:prstGeom prst="rect">
+            <a:avLst/>
+          </a:prstGeom>
+          <a:noFill/>
+        </p:spPr>
+        <p:txBody>
+          <a:bodyPr wrap="square" anchor="ctr" anchorCtr="1">
+            <a:noAutofit/>
+          </a:bodyPr>
+          <a:lstStyle/>
+          <a:p>
+            <a:pPr algn="ctr"/>
+            <a:r>
+              <a:rPr lang="en-US" sz="8000" b="1">
+                <a:solidFill>
+                  <a:srgbClr val="808080">
+                    <a:alpha val="25000"/>
+                  </a:srgbClr>
+                </a:solidFill>
+                <a:latin typeface="Arial"/>
               </a:rPr>
               <a:t>AURIX</a:t>
             </a:r>
@@ -8082,7 +8449,7 @@
 </file>
 
 <file path=ppt/slides/slide17.xml><?xml version="1.0" encoding="utf-8"?>
-<p:sld xmlns:a="http://schemas.openxmlformats.org/drawingml/2006/main" xmlns:p="http://schemas.openxmlformats.org/presentationml/2006/main" xmlns:r="http://schemas.openxmlformats.org/officeDocument/2006/relationships">
+<p:sld xmlns:a="http://schemas.openxmlformats.org/drawingml/2006/main" xmlns:r="http://schemas.openxmlformats.org/officeDocument/2006/relationships" xmlns:p="http://schemas.openxmlformats.org/presentationml/2006/main">
   <p:cSld>
     <p:spTree>
       <p:nvGrpSpPr>
@@ -8090,7 +8457,14 @@
         <p:cNvGrpSpPr/>
         <p:nvPr/>
       </p:nvGrpSpPr>
-      <p:grpSpPr/>
+      <p:grpSpPr>
+        <a:xfrm>
+          <a:off x="0" y="0"/>
+          <a:ext cx="0" cy="0"/>
+          <a:chOff x="0" y="0"/>
+          <a:chExt cx="0" cy="0"/>
+        </a:xfrm>
+      </p:grpSpPr>
       <p:sp>
         <p:nvSpPr>
           <p:cNvPr id="2" name="Rectangle 1"/>
@@ -8132,6 +8506,7 @@
           <a:lstStyle/>
           <a:p>
             <a:pPr algn="ctr"/>
+            <a:endParaRPr/>
           </a:p>
         </p:txBody>
       </p:sp>
@@ -8260,6 +8635,7 @@
           <a:lstStyle/>
           <a:p>
             <a:pPr algn="ctr"/>
+            <a:endParaRPr/>
           </a:p>
         </p:txBody>
       </p:sp>
@@ -8553,6 +8929,43 @@
                   <a:srgbClr val="64748B"/>
                 </a:solidFill>
                 <a:latin typeface="맑은 고딕"/>
+              </a:rPr>
+              <a:t>AURIX</a:t>
+            </a:r>
+          </a:p>
+        </p:txBody>
+      </p:sp>
+      <p:sp>
+        <p:nvSpPr>
+          <p:cNvPr id="90001" name="Watermark AURIX"/>
+          <p:cNvSpPr txBox="1"/>
+          <p:nvPr userDrawn="1"/>
+        </p:nvSpPr>
+        <p:spPr>
+          <a:xfrm rot="18300000">
+            <a:off x="2596000" y="2529000"/>
+            <a:ext cx="7000000" cy="1800000"/>
+          </a:xfrm>
+          <a:prstGeom prst="rect">
+            <a:avLst/>
+          </a:prstGeom>
+          <a:noFill/>
+        </p:spPr>
+        <p:txBody>
+          <a:bodyPr wrap="square" anchor="ctr" anchorCtr="1">
+            <a:noAutofit/>
+          </a:bodyPr>
+          <a:lstStyle/>
+          <a:p>
+            <a:pPr algn="ctr"/>
+            <a:r>
+              <a:rPr lang="en-US" sz="8000" b="1">
+                <a:solidFill>
+                  <a:srgbClr val="808080">
+                    <a:alpha val="25000"/>
+                  </a:srgbClr>
+                </a:solidFill>
+                <a:latin typeface="Arial"/>
               </a:rPr>
               <a:t>AURIX</a:t>
             </a:r>
@@ -8568,7 +8981,7 @@
 </file>
 
 <file path=ppt/slides/slide18.xml><?xml version="1.0" encoding="utf-8"?>
-<p:sld xmlns:a="http://schemas.openxmlformats.org/drawingml/2006/main" xmlns:p="http://schemas.openxmlformats.org/presentationml/2006/main" xmlns:r="http://schemas.openxmlformats.org/officeDocument/2006/relationships">
+<p:sld xmlns:a="http://schemas.openxmlformats.org/drawingml/2006/main" xmlns:r="http://schemas.openxmlformats.org/officeDocument/2006/relationships" xmlns:p="http://schemas.openxmlformats.org/presentationml/2006/main">
   <p:cSld>
     <p:spTree>
       <p:nvGrpSpPr>
@@ -8576,7 +8989,14 @@
         <p:cNvGrpSpPr/>
         <p:nvPr/>
       </p:nvGrpSpPr>
-      <p:grpSpPr/>
+      <p:grpSpPr>
+        <a:xfrm>
+          <a:off x="0" y="0"/>
+          <a:ext cx="0" cy="0"/>
+          <a:chOff x="0" y="0"/>
+          <a:chExt cx="0" cy="0"/>
+        </a:xfrm>
+      </p:grpSpPr>
       <p:sp>
         <p:nvSpPr>
           <p:cNvPr id="2" name="Rectangle 1"/>
@@ -8618,6 +9038,7 @@
           <a:lstStyle/>
           <a:p>
             <a:pPr algn="ctr"/>
+            <a:endParaRPr/>
           </a:p>
         </p:txBody>
       </p:sp>
@@ -8746,6 +9167,7 @@
           <a:lstStyle/>
           <a:p>
             <a:pPr algn="ctr"/>
+            <a:endParaRPr/>
           </a:p>
         </p:txBody>
       </p:sp>
@@ -9011,6 +9433,43 @@
                   <a:srgbClr val="64748B"/>
                 </a:solidFill>
                 <a:latin typeface="맑은 고딕"/>
+              </a:rPr>
+              <a:t>AURIX</a:t>
+            </a:r>
+          </a:p>
+        </p:txBody>
+      </p:sp>
+      <p:sp>
+        <p:nvSpPr>
+          <p:cNvPr id="90001" name="Watermark AURIX"/>
+          <p:cNvSpPr txBox="1"/>
+          <p:nvPr userDrawn="1"/>
+        </p:nvSpPr>
+        <p:spPr>
+          <a:xfrm rot="18300000">
+            <a:off x="2596000" y="2529000"/>
+            <a:ext cx="7000000" cy="1800000"/>
+          </a:xfrm>
+          <a:prstGeom prst="rect">
+            <a:avLst/>
+          </a:prstGeom>
+          <a:noFill/>
+        </p:spPr>
+        <p:txBody>
+          <a:bodyPr wrap="square" anchor="ctr" anchorCtr="1">
+            <a:noAutofit/>
+          </a:bodyPr>
+          <a:lstStyle/>
+          <a:p>
+            <a:pPr algn="ctr"/>
+            <a:r>
+              <a:rPr lang="en-US" sz="8000" b="1">
+                <a:solidFill>
+                  <a:srgbClr val="808080">
+                    <a:alpha val="25000"/>
+                  </a:srgbClr>
+                </a:solidFill>
+                <a:latin typeface="Arial"/>
               </a:rPr>
               <a:t>AURIX</a:t>
             </a:r>
@@ -9026,7 +9485,7 @@
 </file>
 
 <file path=ppt/slides/slide19.xml><?xml version="1.0" encoding="utf-8"?>
-<p:sld xmlns:a="http://schemas.openxmlformats.org/drawingml/2006/main" xmlns:p="http://schemas.openxmlformats.org/presentationml/2006/main" xmlns:r="http://schemas.openxmlformats.org/officeDocument/2006/relationships">
+<p:sld xmlns:a="http://schemas.openxmlformats.org/drawingml/2006/main" xmlns:r="http://schemas.openxmlformats.org/officeDocument/2006/relationships" xmlns:p="http://schemas.openxmlformats.org/presentationml/2006/main">
   <p:cSld>
     <p:spTree>
       <p:nvGrpSpPr>
@@ -9034,7 +9493,14 @@
         <p:cNvGrpSpPr/>
         <p:nvPr/>
       </p:nvGrpSpPr>
-      <p:grpSpPr/>
+      <p:grpSpPr>
+        <a:xfrm>
+          <a:off x="0" y="0"/>
+          <a:ext cx="0" cy="0"/>
+          <a:chOff x="0" y="0"/>
+          <a:chExt cx="0" cy="0"/>
+        </a:xfrm>
+      </p:grpSpPr>
       <p:sp>
         <p:nvSpPr>
           <p:cNvPr id="2" name="Rectangle 1"/>
@@ -9076,6 +9542,7 @@
           <a:lstStyle/>
           <a:p>
             <a:pPr algn="ctr"/>
+            <a:endParaRPr/>
           </a:p>
         </p:txBody>
       </p:sp>
@@ -9204,6 +9671,7 @@
           <a:lstStyle/>
           <a:p>
             <a:pPr algn="ctr"/>
+            <a:endParaRPr/>
           </a:p>
         </p:txBody>
       </p:sp>
@@ -9518,6 +9986,43 @@
                   <a:srgbClr val="64748B"/>
                 </a:solidFill>
                 <a:latin typeface="맑은 고딕"/>
+              </a:rPr>
+              <a:t>AURIX</a:t>
+            </a:r>
+          </a:p>
+        </p:txBody>
+      </p:sp>
+      <p:sp>
+        <p:nvSpPr>
+          <p:cNvPr id="90001" name="Watermark AURIX"/>
+          <p:cNvSpPr txBox="1"/>
+          <p:nvPr userDrawn="1"/>
+        </p:nvSpPr>
+        <p:spPr>
+          <a:xfrm rot="18300000">
+            <a:off x="2596000" y="2529000"/>
+            <a:ext cx="7000000" cy="1800000"/>
+          </a:xfrm>
+          <a:prstGeom prst="rect">
+            <a:avLst/>
+          </a:prstGeom>
+          <a:noFill/>
+        </p:spPr>
+        <p:txBody>
+          <a:bodyPr wrap="square" anchor="ctr" anchorCtr="1">
+            <a:noAutofit/>
+          </a:bodyPr>
+          <a:lstStyle/>
+          <a:p>
+            <a:pPr algn="ctr"/>
+            <a:r>
+              <a:rPr lang="en-US" sz="8000" b="1">
+                <a:solidFill>
+                  <a:srgbClr val="808080">
+                    <a:alpha val="25000"/>
+                  </a:srgbClr>
+                </a:solidFill>
+                <a:latin typeface="Arial"/>
               </a:rPr>
               <a:t>AURIX</a:t>
             </a:r>
@@ -9533,7 +10038,7 @@
 </file>
 
 <file path=ppt/slides/slide2.xml><?xml version="1.0" encoding="utf-8"?>
-<p:sld xmlns:a="http://schemas.openxmlformats.org/drawingml/2006/main" xmlns:p="http://schemas.openxmlformats.org/presentationml/2006/main" xmlns:r="http://schemas.openxmlformats.org/officeDocument/2006/relationships">
+<p:sld xmlns:a="http://schemas.openxmlformats.org/drawingml/2006/main" xmlns:r="http://schemas.openxmlformats.org/officeDocument/2006/relationships" xmlns:p="http://schemas.openxmlformats.org/presentationml/2006/main">
   <p:cSld>
     <p:spTree>
       <p:nvGrpSpPr>
@@ -9541,7 +10046,14 @@
         <p:cNvGrpSpPr/>
         <p:nvPr/>
       </p:nvGrpSpPr>
-      <p:grpSpPr/>
+      <p:grpSpPr>
+        <a:xfrm>
+          <a:off x="0" y="0"/>
+          <a:ext cx="0" cy="0"/>
+          <a:chOff x="0" y="0"/>
+          <a:chExt cx="0" cy="0"/>
+        </a:xfrm>
+      </p:grpSpPr>
       <p:sp>
         <p:nvSpPr>
           <p:cNvPr id="2" name="Rectangle 1"/>
@@ -9583,6 +10095,7 @@
           <a:lstStyle/>
           <a:p>
             <a:pPr algn="ctr"/>
+            <a:endParaRPr/>
           </a:p>
         </p:txBody>
       </p:sp>
@@ -9711,6 +10224,7 @@
           <a:lstStyle/>
           <a:p>
             <a:pPr algn="ctr"/>
+            <a:endParaRPr/>
           </a:p>
         </p:txBody>
       </p:sp>
@@ -10025,6 +10539,43 @@
                   <a:srgbClr val="64748B"/>
                 </a:solidFill>
                 <a:latin typeface="맑은 고딕"/>
+              </a:rPr>
+              <a:t>AURIX</a:t>
+            </a:r>
+          </a:p>
+        </p:txBody>
+      </p:sp>
+      <p:sp>
+        <p:nvSpPr>
+          <p:cNvPr id="90001" name="Watermark AURIX"/>
+          <p:cNvSpPr txBox="1"/>
+          <p:nvPr userDrawn="1"/>
+        </p:nvSpPr>
+        <p:spPr>
+          <a:xfrm rot="18300000">
+            <a:off x="2596000" y="2529000"/>
+            <a:ext cx="7000000" cy="1800000"/>
+          </a:xfrm>
+          <a:prstGeom prst="rect">
+            <a:avLst/>
+          </a:prstGeom>
+          <a:noFill/>
+        </p:spPr>
+        <p:txBody>
+          <a:bodyPr wrap="square" anchor="ctr" anchorCtr="1">
+            <a:noAutofit/>
+          </a:bodyPr>
+          <a:lstStyle/>
+          <a:p>
+            <a:pPr algn="ctr"/>
+            <a:r>
+              <a:rPr lang="en-US" sz="8000" b="1">
+                <a:solidFill>
+                  <a:srgbClr val="808080">
+                    <a:alpha val="25000"/>
+                  </a:srgbClr>
+                </a:solidFill>
+                <a:latin typeface="Arial"/>
               </a:rPr>
               <a:t>AURIX</a:t>
             </a:r>
@@ -10040,7 +10591,7 @@
 </file>
 
 <file path=ppt/slides/slide20.xml><?xml version="1.0" encoding="utf-8"?>
-<p:sld xmlns:a="http://schemas.openxmlformats.org/drawingml/2006/main" xmlns:p="http://schemas.openxmlformats.org/presentationml/2006/main" xmlns:r="http://schemas.openxmlformats.org/officeDocument/2006/relationships">
+<p:sld xmlns:a="http://schemas.openxmlformats.org/drawingml/2006/main" xmlns:r="http://schemas.openxmlformats.org/officeDocument/2006/relationships" xmlns:p="http://schemas.openxmlformats.org/presentationml/2006/main">
   <p:cSld>
     <p:spTree>
       <p:nvGrpSpPr>
@@ -10048,7 +10599,14 @@
         <p:cNvGrpSpPr/>
         <p:nvPr/>
       </p:nvGrpSpPr>
-      <p:grpSpPr/>
+      <p:grpSpPr>
+        <a:xfrm>
+          <a:off x="0" y="0"/>
+          <a:ext cx="0" cy="0"/>
+          <a:chOff x="0" y="0"/>
+          <a:chExt cx="0" cy="0"/>
+        </a:xfrm>
+      </p:grpSpPr>
       <p:sp>
         <p:nvSpPr>
           <p:cNvPr id="2" name="Rectangle 1"/>
@@ -10090,6 +10648,7 @@
           <a:lstStyle/>
           <a:p>
             <a:pPr algn="ctr"/>
+            <a:endParaRPr/>
           </a:p>
         </p:txBody>
       </p:sp>
@@ -10218,6 +10777,7 @@
           <a:lstStyle/>
           <a:p>
             <a:pPr algn="ctr"/>
+            <a:endParaRPr/>
           </a:p>
         </p:txBody>
       </p:sp>
@@ -10264,6 +10824,7 @@
           <a:lstStyle/>
           <a:p>
             <a:pPr algn="ctr"/>
+            <a:endParaRPr/>
           </a:p>
         </p:txBody>
       </p:sp>
@@ -10352,6 +10913,7 @@
           <a:lstStyle/>
           <a:p>
             <a:pPr algn="ctr"/>
+            <a:endParaRPr/>
           </a:p>
         </p:txBody>
       </p:sp>
@@ -10440,6 +11002,7 @@
           <a:lstStyle/>
           <a:p>
             <a:pPr algn="ctr"/>
+            <a:endParaRPr/>
           </a:p>
         </p:txBody>
       </p:sp>
@@ -10528,6 +11091,7 @@
           <a:lstStyle/>
           <a:p>
             <a:pPr algn="ctr"/>
+            <a:endParaRPr/>
           </a:p>
         </p:txBody>
       </p:sp>
@@ -10616,6 +11180,7 @@
           <a:lstStyle/>
           <a:p>
             <a:pPr algn="ctr"/>
+            <a:endParaRPr/>
           </a:p>
         </p:txBody>
       </p:sp>
@@ -10704,6 +11269,7 @@
           <a:lstStyle/>
           <a:p>
             <a:pPr algn="ctr"/>
+            <a:endParaRPr/>
           </a:p>
         </p:txBody>
       </p:sp>
@@ -10862,6 +11428,43 @@
                   <a:srgbClr val="64748B"/>
                 </a:solidFill>
                 <a:latin typeface="맑은 고딕"/>
+              </a:rPr>
+              <a:t>AURIX</a:t>
+            </a:r>
+          </a:p>
+        </p:txBody>
+      </p:sp>
+      <p:sp>
+        <p:nvSpPr>
+          <p:cNvPr id="90001" name="Watermark AURIX"/>
+          <p:cNvSpPr txBox="1"/>
+          <p:nvPr userDrawn="1"/>
+        </p:nvSpPr>
+        <p:spPr>
+          <a:xfrm rot="18300000">
+            <a:off x="2596000" y="2529000"/>
+            <a:ext cx="7000000" cy="1800000"/>
+          </a:xfrm>
+          <a:prstGeom prst="rect">
+            <a:avLst/>
+          </a:prstGeom>
+          <a:noFill/>
+        </p:spPr>
+        <p:txBody>
+          <a:bodyPr wrap="square" anchor="ctr" anchorCtr="1">
+            <a:noAutofit/>
+          </a:bodyPr>
+          <a:lstStyle/>
+          <a:p>
+            <a:pPr algn="ctr"/>
+            <a:r>
+              <a:rPr lang="en-US" sz="8000" b="1">
+                <a:solidFill>
+                  <a:srgbClr val="808080">
+                    <a:alpha val="25000"/>
+                  </a:srgbClr>
+                </a:solidFill>
+                <a:latin typeface="Arial"/>
               </a:rPr>
               <a:t>AURIX</a:t>
             </a:r>
@@ -10877,7 +11480,7 @@
 </file>
 
 <file path=ppt/slides/slide21.xml><?xml version="1.0" encoding="utf-8"?>
-<p:sld xmlns:a="http://schemas.openxmlformats.org/drawingml/2006/main" xmlns:p="http://schemas.openxmlformats.org/presentationml/2006/main" xmlns:r="http://schemas.openxmlformats.org/officeDocument/2006/relationships">
+<p:sld xmlns:a="http://schemas.openxmlformats.org/drawingml/2006/main" xmlns:r="http://schemas.openxmlformats.org/officeDocument/2006/relationships" xmlns:p="http://schemas.openxmlformats.org/presentationml/2006/main">
   <p:cSld>
     <p:spTree>
       <p:nvGrpSpPr>
@@ -10885,7 +11488,14 @@
         <p:cNvGrpSpPr/>
         <p:nvPr/>
       </p:nvGrpSpPr>
-      <p:grpSpPr/>
+      <p:grpSpPr>
+        <a:xfrm>
+          <a:off x="0" y="0"/>
+          <a:ext cx="0" cy="0"/>
+          <a:chOff x="0" y="0"/>
+          <a:chExt cx="0" cy="0"/>
+        </a:xfrm>
+      </p:grpSpPr>
       <p:sp>
         <p:nvSpPr>
           <p:cNvPr id="2" name="Rectangle 1"/>
@@ -10927,6 +11537,7 @@
           <a:lstStyle/>
           <a:p>
             <a:pPr algn="ctr"/>
+            <a:endParaRPr/>
           </a:p>
         </p:txBody>
       </p:sp>
@@ -11055,6 +11666,7 @@
           <a:lstStyle/>
           <a:p>
             <a:pPr algn="ctr"/>
+            <a:endParaRPr/>
           </a:p>
         </p:txBody>
       </p:sp>
@@ -11101,6 +11713,7 @@
           <a:lstStyle/>
           <a:p>
             <a:pPr algn="ctr"/>
+            <a:endParaRPr/>
           </a:p>
         </p:txBody>
       </p:sp>
@@ -11189,6 +11802,7 @@
           <a:lstStyle/>
           <a:p>
             <a:pPr algn="ctr"/>
+            <a:endParaRPr/>
           </a:p>
         </p:txBody>
       </p:sp>
@@ -11277,6 +11891,7 @@
           <a:lstStyle/>
           <a:p>
             <a:pPr algn="ctr"/>
+            <a:endParaRPr/>
           </a:p>
         </p:txBody>
       </p:sp>
@@ -11365,6 +11980,7 @@
           <a:lstStyle/>
           <a:p>
             <a:pPr algn="ctr"/>
+            <a:endParaRPr/>
           </a:p>
         </p:txBody>
       </p:sp>
@@ -11453,6 +12069,7 @@
           <a:lstStyle/>
           <a:p>
             <a:pPr algn="ctr"/>
+            <a:endParaRPr/>
           </a:p>
         </p:txBody>
       </p:sp>
@@ -11541,6 +12158,7 @@
           <a:lstStyle/>
           <a:p>
             <a:pPr algn="ctr"/>
+            <a:endParaRPr/>
           </a:p>
         </p:txBody>
       </p:sp>
@@ -11699,6 +12317,43 @@
                   <a:srgbClr val="64748B"/>
                 </a:solidFill>
                 <a:latin typeface="맑은 고딕"/>
+              </a:rPr>
+              <a:t>AURIX</a:t>
+            </a:r>
+          </a:p>
+        </p:txBody>
+      </p:sp>
+      <p:sp>
+        <p:nvSpPr>
+          <p:cNvPr id="90001" name="Watermark AURIX"/>
+          <p:cNvSpPr txBox="1"/>
+          <p:nvPr userDrawn="1"/>
+        </p:nvSpPr>
+        <p:spPr>
+          <a:xfrm rot="18300000">
+            <a:off x="2596000" y="2529000"/>
+            <a:ext cx="7000000" cy="1800000"/>
+          </a:xfrm>
+          <a:prstGeom prst="rect">
+            <a:avLst/>
+          </a:prstGeom>
+          <a:noFill/>
+        </p:spPr>
+        <p:txBody>
+          <a:bodyPr wrap="square" anchor="ctr" anchorCtr="1">
+            <a:noAutofit/>
+          </a:bodyPr>
+          <a:lstStyle/>
+          <a:p>
+            <a:pPr algn="ctr"/>
+            <a:r>
+              <a:rPr lang="en-US" sz="8000" b="1">
+                <a:solidFill>
+                  <a:srgbClr val="808080">
+                    <a:alpha val="25000"/>
+                  </a:srgbClr>
+                </a:solidFill>
+                <a:latin typeface="Arial"/>
               </a:rPr>
               <a:t>AURIX</a:t>
             </a:r>
@@ -11714,7 +12369,7 @@
 </file>
 
 <file path=ppt/slides/slide22.xml><?xml version="1.0" encoding="utf-8"?>
-<p:sld xmlns:a="http://schemas.openxmlformats.org/drawingml/2006/main" xmlns:p="http://schemas.openxmlformats.org/presentationml/2006/main" xmlns:r="http://schemas.openxmlformats.org/officeDocument/2006/relationships">
+<p:sld xmlns:a="http://schemas.openxmlformats.org/drawingml/2006/main" xmlns:r="http://schemas.openxmlformats.org/officeDocument/2006/relationships" xmlns:p="http://schemas.openxmlformats.org/presentationml/2006/main">
   <p:cSld>
     <p:spTree>
       <p:nvGrpSpPr>
@@ -11722,7 +12377,14 @@
         <p:cNvGrpSpPr/>
         <p:nvPr/>
       </p:nvGrpSpPr>
-      <p:grpSpPr/>
+      <p:grpSpPr>
+        <a:xfrm>
+          <a:off x="0" y="0"/>
+          <a:ext cx="0" cy="0"/>
+          <a:chOff x="0" y="0"/>
+          <a:chExt cx="0" cy="0"/>
+        </a:xfrm>
+      </p:grpSpPr>
       <p:sp>
         <p:nvSpPr>
           <p:cNvPr id="2" name="Rectangle 1"/>
@@ -11764,6 +12426,7 @@
           <a:lstStyle/>
           <a:p>
             <a:pPr algn="ctr"/>
+            <a:endParaRPr/>
           </a:p>
         </p:txBody>
       </p:sp>
@@ -11892,6 +12555,7 @@
           <a:lstStyle/>
           <a:p>
             <a:pPr algn="ctr"/>
+            <a:endParaRPr/>
           </a:p>
         </p:txBody>
       </p:sp>
@@ -11938,6 +12602,7 @@
           <a:lstStyle/>
           <a:p>
             <a:pPr algn="ctr"/>
+            <a:endParaRPr/>
           </a:p>
         </p:txBody>
       </p:sp>
@@ -12026,6 +12691,7 @@
           <a:lstStyle/>
           <a:p>
             <a:pPr algn="ctr"/>
+            <a:endParaRPr/>
           </a:p>
         </p:txBody>
       </p:sp>
@@ -12114,6 +12780,7 @@
           <a:lstStyle/>
           <a:p>
             <a:pPr algn="ctr"/>
+            <a:endParaRPr/>
           </a:p>
         </p:txBody>
       </p:sp>
@@ -12202,6 +12869,7 @@
           <a:lstStyle/>
           <a:p>
             <a:pPr algn="ctr"/>
+            <a:endParaRPr/>
           </a:p>
         </p:txBody>
       </p:sp>
@@ -12290,6 +12958,7 @@
           <a:lstStyle/>
           <a:p>
             <a:pPr algn="ctr"/>
+            <a:endParaRPr/>
           </a:p>
         </p:txBody>
       </p:sp>
@@ -12378,6 +13047,7 @@
           <a:lstStyle/>
           <a:p>
             <a:pPr algn="ctr"/>
+            <a:endParaRPr/>
           </a:p>
         </p:txBody>
       </p:sp>
@@ -12536,6 +13206,43 @@
                   <a:srgbClr val="64748B"/>
                 </a:solidFill>
                 <a:latin typeface="맑은 고딕"/>
+              </a:rPr>
+              <a:t>AURIX</a:t>
+            </a:r>
+          </a:p>
+        </p:txBody>
+      </p:sp>
+      <p:sp>
+        <p:nvSpPr>
+          <p:cNvPr id="90001" name="Watermark AURIX"/>
+          <p:cNvSpPr txBox="1"/>
+          <p:nvPr userDrawn="1"/>
+        </p:nvSpPr>
+        <p:spPr>
+          <a:xfrm rot="18300000">
+            <a:off x="2596000" y="2529000"/>
+            <a:ext cx="7000000" cy="1800000"/>
+          </a:xfrm>
+          <a:prstGeom prst="rect">
+            <a:avLst/>
+          </a:prstGeom>
+          <a:noFill/>
+        </p:spPr>
+        <p:txBody>
+          <a:bodyPr wrap="square" anchor="ctr" anchorCtr="1">
+            <a:noAutofit/>
+          </a:bodyPr>
+          <a:lstStyle/>
+          <a:p>
+            <a:pPr algn="ctr"/>
+            <a:r>
+              <a:rPr lang="en-US" sz="8000" b="1">
+                <a:solidFill>
+                  <a:srgbClr val="808080">
+                    <a:alpha val="25000"/>
+                  </a:srgbClr>
+                </a:solidFill>
+                <a:latin typeface="Arial"/>
               </a:rPr>
               <a:t>AURIX</a:t>
             </a:r>
@@ -12551,7 +13258,7 @@
 </file>
 
 <file path=ppt/slides/slide23.xml><?xml version="1.0" encoding="utf-8"?>
-<p:sld xmlns:a="http://schemas.openxmlformats.org/drawingml/2006/main" xmlns:p="http://schemas.openxmlformats.org/presentationml/2006/main" xmlns:r="http://schemas.openxmlformats.org/officeDocument/2006/relationships">
+<p:sld xmlns:a="http://schemas.openxmlformats.org/drawingml/2006/main" xmlns:r="http://schemas.openxmlformats.org/officeDocument/2006/relationships" xmlns:p="http://schemas.openxmlformats.org/presentationml/2006/main">
   <p:cSld>
     <p:spTree>
       <p:nvGrpSpPr>
@@ -12559,7 +13266,14 @@
         <p:cNvGrpSpPr/>
         <p:nvPr/>
       </p:nvGrpSpPr>
-      <p:grpSpPr/>
+      <p:grpSpPr>
+        <a:xfrm>
+          <a:off x="0" y="0"/>
+          <a:ext cx="0" cy="0"/>
+          <a:chOff x="0" y="0"/>
+          <a:chExt cx="0" cy="0"/>
+        </a:xfrm>
+      </p:grpSpPr>
       <p:sp>
         <p:nvSpPr>
           <p:cNvPr id="2" name="Rectangle 1"/>
@@ -12601,6 +13315,7 @@
           <a:lstStyle/>
           <a:p>
             <a:pPr algn="ctr"/>
+            <a:endParaRPr/>
           </a:p>
         </p:txBody>
       </p:sp>
@@ -12729,6 +13444,7 @@
           <a:lstStyle/>
           <a:p>
             <a:pPr algn="ctr"/>
+            <a:endParaRPr/>
           </a:p>
         </p:txBody>
       </p:sp>
@@ -12775,6 +13491,7 @@
           <a:lstStyle/>
           <a:p>
             <a:pPr algn="ctr"/>
+            <a:endParaRPr/>
           </a:p>
         </p:txBody>
       </p:sp>
@@ -12863,6 +13580,7 @@
           <a:lstStyle/>
           <a:p>
             <a:pPr algn="ctr"/>
+            <a:endParaRPr/>
           </a:p>
         </p:txBody>
       </p:sp>
@@ -12951,6 +13669,7 @@
           <a:lstStyle/>
           <a:p>
             <a:pPr algn="ctr"/>
+            <a:endParaRPr/>
           </a:p>
         </p:txBody>
       </p:sp>
@@ -13039,6 +13758,7 @@
           <a:lstStyle/>
           <a:p>
             <a:pPr algn="ctr"/>
+            <a:endParaRPr/>
           </a:p>
         </p:txBody>
       </p:sp>
@@ -13127,6 +13847,7 @@
           <a:lstStyle/>
           <a:p>
             <a:pPr algn="ctr"/>
+            <a:endParaRPr/>
           </a:p>
         </p:txBody>
       </p:sp>
@@ -13215,6 +13936,7 @@
           <a:lstStyle/>
           <a:p>
             <a:pPr algn="ctr"/>
+            <a:endParaRPr/>
           </a:p>
         </p:txBody>
       </p:sp>
@@ -13373,6 +14095,43 @@
                   <a:srgbClr val="64748B"/>
                 </a:solidFill>
                 <a:latin typeface="맑은 고딕"/>
+              </a:rPr>
+              <a:t>AURIX</a:t>
+            </a:r>
+          </a:p>
+        </p:txBody>
+      </p:sp>
+      <p:sp>
+        <p:nvSpPr>
+          <p:cNvPr id="90001" name="Watermark AURIX"/>
+          <p:cNvSpPr txBox="1"/>
+          <p:nvPr userDrawn="1"/>
+        </p:nvSpPr>
+        <p:spPr>
+          <a:xfrm rot="18300000">
+            <a:off x="2596000" y="2529000"/>
+            <a:ext cx="7000000" cy="1800000"/>
+          </a:xfrm>
+          <a:prstGeom prst="rect">
+            <a:avLst/>
+          </a:prstGeom>
+          <a:noFill/>
+        </p:spPr>
+        <p:txBody>
+          <a:bodyPr wrap="square" anchor="ctr" anchorCtr="1">
+            <a:noAutofit/>
+          </a:bodyPr>
+          <a:lstStyle/>
+          <a:p>
+            <a:pPr algn="ctr"/>
+            <a:r>
+              <a:rPr lang="en-US" sz="8000" b="1">
+                <a:solidFill>
+                  <a:srgbClr val="808080">
+                    <a:alpha val="25000"/>
+                  </a:srgbClr>
+                </a:solidFill>
+                <a:latin typeface="Arial"/>
               </a:rPr>
               <a:t>AURIX</a:t>
             </a:r>
@@ -13388,7 +14147,7 @@
 </file>
 
 <file path=ppt/slides/slide24.xml><?xml version="1.0" encoding="utf-8"?>
-<p:sld xmlns:a="http://schemas.openxmlformats.org/drawingml/2006/main" xmlns:p="http://schemas.openxmlformats.org/presentationml/2006/main" xmlns:r="http://schemas.openxmlformats.org/officeDocument/2006/relationships">
+<p:sld xmlns:a="http://schemas.openxmlformats.org/drawingml/2006/main" xmlns:r="http://schemas.openxmlformats.org/officeDocument/2006/relationships" xmlns:p="http://schemas.openxmlformats.org/presentationml/2006/main">
   <p:cSld>
     <p:spTree>
       <p:nvGrpSpPr>
@@ -13396,7 +14155,14 @@
         <p:cNvGrpSpPr/>
         <p:nvPr/>
       </p:nvGrpSpPr>
-      <p:grpSpPr/>
+      <p:grpSpPr>
+        <a:xfrm>
+          <a:off x="0" y="0"/>
+          <a:ext cx="0" cy="0"/>
+          <a:chOff x="0" y="0"/>
+          <a:chExt cx="0" cy="0"/>
+        </a:xfrm>
+      </p:grpSpPr>
       <p:sp>
         <p:nvSpPr>
           <p:cNvPr id="2" name="Rectangle 1"/>
@@ -13438,6 +14204,7 @@
           <a:lstStyle/>
           <a:p>
             <a:pPr algn="ctr"/>
+            <a:endParaRPr/>
           </a:p>
         </p:txBody>
       </p:sp>
@@ -13566,6 +14333,7 @@
           <a:lstStyle/>
           <a:p>
             <a:pPr algn="ctr"/>
+            <a:endParaRPr/>
           </a:p>
         </p:txBody>
       </p:sp>
@@ -13612,6 +14380,7 @@
           <a:lstStyle/>
           <a:p>
             <a:pPr algn="ctr"/>
+            <a:endParaRPr/>
           </a:p>
         </p:txBody>
       </p:sp>
@@ -13700,6 +14469,7 @@
           <a:lstStyle/>
           <a:p>
             <a:pPr algn="ctr"/>
+            <a:endParaRPr/>
           </a:p>
         </p:txBody>
       </p:sp>
@@ -13788,6 +14558,7 @@
           <a:lstStyle/>
           <a:p>
             <a:pPr algn="ctr"/>
+            <a:endParaRPr/>
           </a:p>
         </p:txBody>
       </p:sp>
@@ -13876,6 +14647,7 @@
           <a:lstStyle/>
           <a:p>
             <a:pPr algn="ctr"/>
+            <a:endParaRPr/>
           </a:p>
         </p:txBody>
       </p:sp>
@@ -13964,6 +14736,7 @@
           <a:lstStyle/>
           <a:p>
             <a:pPr algn="ctr"/>
+            <a:endParaRPr/>
           </a:p>
         </p:txBody>
       </p:sp>
@@ -14052,6 +14825,7 @@
           <a:lstStyle/>
           <a:p>
             <a:pPr algn="ctr"/>
+            <a:endParaRPr/>
           </a:p>
         </p:txBody>
       </p:sp>
@@ -14210,6 +14984,43 @@
                   <a:srgbClr val="64748B"/>
                 </a:solidFill>
                 <a:latin typeface="맑은 고딕"/>
+              </a:rPr>
+              <a:t>AURIX</a:t>
+            </a:r>
+          </a:p>
+        </p:txBody>
+      </p:sp>
+      <p:sp>
+        <p:nvSpPr>
+          <p:cNvPr id="90001" name="Watermark AURIX"/>
+          <p:cNvSpPr txBox="1"/>
+          <p:nvPr userDrawn="1"/>
+        </p:nvSpPr>
+        <p:spPr>
+          <a:xfrm rot="18300000">
+            <a:off x="2596000" y="2529000"/>
+            <a:ext cx="7000000" cy="1800000"/>
+          </a:xfrm>
+          <a:prstGeom prst="rect">
+            <a:avLst/>
+          </a:prstGeom>
+          <a:noFill/>
+        </p:spPr>
+        <p:txBody>
+          <a:bodyPr wrap="square" anchor="ctr" anchorCtr="1">
+            <a:noAutofit/>
+          </a:bodyPr>
+          <a:lstStyle/>
+          <a:p>
+            <a:pPr algn="ctr"/>
+            <a:r>
+              <a:rPr lang="en-US" sz="8000" b="1">
+                <a:solidFill>
+                  <a:srgbClr val="808080">
+                    <a:alpha val="25000"/>
+                  </a:srgbClr>
+                </a:solidFill>
+                <a:latin typeface="Arial"/>
               </a:rPr>
               <a:t>AURIX</a:t>
             </a:r>
@@ -14225,7 +15036,7 @@
 </file>
 
 <file path=ppt/slides/slide25.xml><?xml version="1.0" encoding="utf-8"?>
-<p:sld xmlns:a="http://schemas.openxmlformats.org/drawingml/2006/main" xmlns:p="http://schemas.openxmlformats.org/presentationml/2006/main" xmlns:r="http://schemas.openxmlformats.org/officeDocument/2006/relationships">
+<p:sld xmlns:a="http://schemas.openxmlformats.org/drawingml/2006/main" xmlns:r="http://schemas.openxmlformats.org/officeDocument/2006/relationships" xmlns:p="http://schemas.openxmlformats.org/presentationml/2006/main">
   <p:cSld>
     <p:spTree>
       <p:nvGrpSpPr>
@@ -14233,7 +15044,14 @@
         <p:cNvGrpSpPr/>
         <p:nvPr/>
       </p:nvGrpSpPr>
-      <p:grpSpPr/>
+      <p:grpSpPr>
+        <a:xfrm>
+          <a:off x="0" y="0"/>
+          <a:ext cx="0" cy="0"/>
+          <a:chOff x="0" y="0"/>
+          <a:chExt cx="0" cy="0"/>
+        </a:xfrm>
+      </p:grpSpPr>
       <p:sp>
         <p:nvSpPr>
           <p:cNvPr id="2" name="Rectangle 1"/>
@@ -14275,6 +15093,7 @@
           <a:lstStyle/>
           <a:p>
             <a:pPr algn="ctr"/>
+            <a:endParaRPr/>
           </a:p>
         </p:txBody>
       </p:sp>
@@ -14403,6 +15222,7 @@
           <a:lstStyle/>
           <a:p>
             <a:pPr algn="ctr"/>
+            <a:endParaRPr/>
           </a:p>
         </p:txBody>
       </p:sp>
@@ -14449,6 +15269,7 @@
           <a:lstStyle/>
           <a:p>
             <a:pPr algn="ctr"/>
+            <a:endParaRPr/>
           </a:p>
         </p:txBody>
       </p:sp>
@@ -14537,6 +15358,7 @@
           <a:lstStyle/>
           <a:p>
             <a:pPr algn="ctr"/>
+            <a:endParaRPr/>
           </a:p>
         </p:txBody>
       </p:sp>
@@ -14625,6 +15447,7 @@
           <a:lstStyle/>
           <a:p>
             <a:pPr algn="ctr"/>
+            <a:endParaRPr/>
           </a:p>
         </p:txBody>
       </p:sp>
@@ -14713,6 +15536,7 @@
           <a:lstStyle/>
           <a:p>
             <a:pPr algn="ctr"/>
+            <a:endParaRPr/>
           </a:p>
         </p:txBody>
       </p:sp>
@@ -14801,6 +15625,7 @@
           <a:lstStyle/>
           <a:p>
             <a:pPr algn="ctr"/>
+            <a:endParaRPr/>
           </a:p>
         </p:txBody>
       </p:sp>
@@ -14889,6 +15714,7 @@
           <a:lstStyle/>
           <a:p>
             <a:pPr algn="ctr"/>
+            <a:endParaRPr/>
           </a:p>
         </p:txBody>
       </p:sp>
@@ -15089,6 +15915,43 @@
                   <a:srgbClr val="64748B"/>
                 </a:solidFill>
                 <a:latin typeface="맑은 고딕"/>
+              </a:rPr>
+              <a:t>AURIX</a:t>
+            </a:r>
+          </a:p>
+        </p:txBody>
+      </p:sp>
+      <p:sp>
+        <p:nvSpPr>
+          <p:cNvPr id="90001" name="Watermark AURIX"/>
+          <p:cNvSpPr txBox="1"/>
+          <p:nvPr userDrawn="1"/>
+        </p:nvSpPr>
+        <p:spPr>
+          <a:xfrm rot="18300000">
+            <a:off x="2596000" y="2529000"/>
+            <a:ext cx="7000000" cy="1800000"/>
+          </a:xfrm>
+          <a:prstGeom prst="rect">
+            <a:avLst/>
+          </a:prstGeom>
+          <a:noFill/>
+        </p:spPr>
+        <p:txBody>
+          <a:bodyPr wrap="square" anchor="ctr" anchorCtr="1">
+            <a:noAutofit/>
+          </a:bodyPr>
+          <a:lstStyle/>
+          <a:p>
+            <a:pPr algn="ctr"/>
+            <a:r>
+              <a:rPr lang="en-US" sz="8000" b="1">
+                <a:solidFill>
+                  <a:srgbClr val="808080">
+                    <a:alpha val="25000"/>
+                  </a:srgbClr>
+                </a:solidFill>
+                <a:latin typeface="Arial"/>
               </a:rPr>
               <a:t>AURIX</a:t>
             </a:r>
@@ -15104,7 +15967,7 @@
 </file>
 
 <file path=ppt/slides/slide26.xml><?xml version="1.0" encoding="utf-8"?>
-<p:sld xmlns:a="http://schemas.openxmlformats.org/drawingml/2006/main" xmlns:p="http://schemas.openxmlformats.org/presentationml/2006/main" xmlns:r="http://schemas.openxmlformats.org/officeDocument/2006/relationships">
+<p:sld xmlns:a="http://schemas.openxmlformats.org/drawingml/2006/main" xmlns:r="http://schemas.openxmlformats.org/officeDocument/2006/relationships" xmlns:p="http://schemas.openxmlformats.org/presentationml/2006/main">
   <p:cSld>
     <p:spTree>
       <p:nvGrpSpPr>
@@ -15112,7 +15975,14 @@
         <p:cNvGrpSpPr/>
         <p:nvPr/>
       </p:nvGrpSpPr>
-      <p:grpSpPr/>
+      <p:grpSpPr>
+        <a:xfrm>
+          <a:off x="0" y="0"/>
+          <a:ext cx="0" cy="0"/>
+          <a:chOff x="0" y="0"/>
+          <a:chExt cx="0" cy="0"/>
+        </a:xfrm>
+      </p:grpSpPr>
       <p:sp>
         <p:nvSpPr>
           <p:cNvPr id="2" name="Rectangle 1"/>
@@ -15154,6 +16024,7 @@
           <a:lstStyle/>
           <a:p>
             <a:pPr algn="ctr"/>
+            <a:endParaRPr/>
           </a:p>
         </p:txBody>
       </p:sp>
@@ -15282,6 +16153,7 @@
           <a:lstStyle/>
           <a:p>
             <a:pPr algn="ctr"/>
+            <a:endParaRPr/>
           </a:p>
         </p:txBody>
       </p:sp>
@@ -15328,6 +16200,7 @@
           <a:lstStyle/>
           <a:p>
             <a:pPr algn="ctr"/>
+            <a:endParaRPr/>
           </a:p>
         </p:txBody>
       </p:sp>
@@ -15416,6 +16289,7 @@
           <a:lstStyle/>
           <a:p>
             <a:pPr algn="ctr"/>
+            <a:endParaRPr/>
           </a:p>
         </p:txBody>
       </p:sp>
@@ -15504,6 +16378,7 @@
           <a:lstStyle/>
           <a:p>
             <a:pPr algn="ctr"/>
+            <a:endParaRPr/>
           </a:p>
         </p:txBody>
       </p:sp>
@@ -15592,6 +16467,7 @@
           <a:lstStyle/>
           <a:p>
             <a:pPr algn="ctr"/>
+            <a:endParaRPr/>
           </a:p>
         </p:txBody>
       </p:sp>
@@ -15680,6 +16556,7 @@
           <a:lstStyle/>
           <a:p>
             <a:pPr algn="ctr"/>
+            <a:endParaRPr/>
           </a:p>
         </p:txBody>
       </p:sp>
@@ -15768,6 +16645,7 @@
           <a:lstStyle/>
           <a:p>
             <a:pPr algn="ctr"/>
+            <a:endParaRPr/>
           </a:p>
         </p:txBody>
       </p:sp>
@@ -15968,6 +16846,43 @@
                   <a:srgbClr val="64748B"/>
                 </a:solidFill>
                 <a:latin typeface="맑은 고딕"/>
+              </a:rPr>
+              <a:t>AURIX</a:t>
+            </a:r>
+          </a:p>
+        </p:txBody>
+      </p:sp>
+      <p:sp>
+        <p:nvSpPr>
+          <p:cNvPr id="90001" name="Watermark AURIX"/>
+          <p:cNvSpPr txBox="1"/>
+          <p:nvPr userDrawn="1"/>
+        </p:nvSpPr>
+        <p:spPr>
+          <a:xfrm rot="18300000">
+            <a:off x="2596000" y="2529000"/>
+            <a:ext cx="7000000" cy="1800000"/>
+          </a:xfrm>
+          <a:prstGeom prst="rect">
+            <a:avLst/>
+          </a:prstGeom>
+          <a:noFill/>
+        </p:spPr>
+        <p:txBody>
+          <a:bodyPr wrap="square" anchor="ctr" anchorCtr="1">
+            <a:noAutofit/>
+          </a:bodyPr>
+          <a:lstStyle/>
+          <a:p>
+            <a:pPr algn="ctr"/>
+            <a:r>
+              <a:rPr lang="en-US" sz="8000" b="1">
+                <a:solidFill>
+                  <a:srgbClr val="808080">
+                    <a:alpha val="25000"/>
+                  </a:srgbClr>
+                </a:solidFill>
+                <a:latin typeface="Arial"/>
               </a:rPr>
               <a:t>AURIX</a:t>
             </a:r>
@@ -15983,7 +16898,7 @@
 </file>
 
 <file path=ppt/slides/slide27.xml><?xml version="1.0" encoding="utf-8"?>
-<p:sld xmlns:a="http://schemas.openxmlformats.org/drawingml/2006/main" xmlns:p="http://schemas.openxmlformats.org/presentationml/2006/main" xmlns:r="http://schemas.openxmlformats.org/officeDocument/2006/relationships">
+<p:sld xmlns:a="http://schemas.openxmlformats.org/drawingml/2006/main" xmlns:r="http://schemas.openxmlformats.org/officeDocument/2006/relationships" xmlns:p="http://schemas.openxmlformats.org/presentationml/2006/main">
   <p:cSld>
     <p:spTree>
       <p:nvGrpSpPr>
@@ -15991,7 +16906,14 @@
         <p:cNvGrpSpPr/>
         <p:nvPr/>
       </p:nvGrpSpPr>
-      <p:grpSpPr/>
+      <p:grpSpPr>
+        <a:xfrm>
+          <a:off x="0" y="0"/>
+          <a:ext cx="0" cy="0"/>
+          <a:chOff x="0" y="0"/>
+          <a:chExt cx="0" cy="0"/>
+        </a:xfrm>
+      </p:grpSpPr>
       <p:sp>
         <p:nvSpPr>
           <p:cNvPr id="2" name="Rectangle 1"/>
@@ -16033,6 +16955,7 @@
           <a:lstStyle/>
           <a:p>
             <a:pPr algn="ctr"/>
+            <a:endParaRPr/>
           </a:p>
         </p:txBody>
       </p:sp>
@@ -16077,6 +17000,7 @@
           <a:lstStyle/>
           <a:p>
             <a:pPr algn="ctr"/>
+            <a:endParaRPr/>
           </a:p>
         </p:txBody>
       </p:sp>
@@ -16121,6 +17045,7 @@
           <a:lstStyle/>
           <a:p>
             <a:pPr algn="ctr"/>
+            <a:endParaRPr/>
           </a:p>
         </p:txBody>
       </p:sp>
@@ -16336,6 +17261,43 @@
                   <a:srgbClr val="64748B"/>
                 </a:solidFill>
                 <a:latin typeface="맑은 고딕"/>
+              </a:rPr>
+              <a:t>AURIX</a:t>
+            </a:r>
+          </a:p>
+        </p:txBody>
+      </p:sp>
+      <p:sp>
+        <p:nvSpPr>
+          <p:cNvPr id="90001" name="Watermark AURIX"/>
+          <p:cNvSpPr txBox="1"/>
+          <p:nvPr userDrawn="1"/>
+        </p:nvSpPr>
+        <p:spPr>
+          <a:xfrm rot="18300000">
+            <a:off x="2596000" y="2529000"/>
+            <a:ext cx="7000000" cy="1800000"/>
+          </a:xfrm>
+          <a:prstGeom prst="rect">
+            <a:avLst/>
+          </a:prstGeom>
+          <a:noFill/>
+        </p:spPr>
+        <p:txBody>
+          <a:bodyPr wrap="square" anchor="ctr" anchorCtr="1">
+            <a:noAutofit/>
+          </a:bodyPr>
+          <a:lstStyle/>
+          <a:p>
+            <a:pPr algn="ctr"/>
+            <a:r>
+              <a:rPr lang="en-US" sz="8000" b="1">
+                <a:solidFill>
+                  <a:srgbClr val="808080">
+                    <a:alpha val="25000"/>
+                  </a:srgbClr>
+                </a:solidFill>
+                <a:latin typeface="Arial"/>
               </a:rPr>
               <a:t>AURIX</a:t>
             </a:r>
@@ -16350,8 +17312,677 @@
 </p:sld>
 </file>
 
+<file path=ppt/slides/slide28.xml><?xml version="1.0" encoding="utf-8"?>
+<p:sld xmlns:a="http://schemas.openxmlformats.org/drawingml/2006/main" xmlns:r="http://schemas.openxmlformats.org/officeDocument/2006/relationships" xmlns:p="http://schemas.openxmlformats.org/presentationml/2006/main">
+  <p:cSld>
+    <p:spTree>
+      <p:nvGrpSpPr>
+        <p:cNvPr id="1" name="">
+          <a:extLst>
+            <a:ext uri="{FF2B5EF4-FFF2-40B4-BE49-F238E27FC236}">
+              <a16:creationId xmlns:a16="http://schemas.microsoft.com/office/drawing/2014/main" id="{F59D73CC-48A6-9AD6-5016-842559137C7F}"/>
+            </a:ext>
+          </a:extLst>
+        </p:cNvPr>
+        <p:cNvGrpSpPr/>
+        <p:nvPr/>
+      </p:nvGrpSpPr>
+      <p:grpSpPr>
+        <a:xfrm>
+          <a:off x="0" y="0"/>
+          <a:ext cx="0" cy="0"/>
+          <a:chOff x="0" y="0"/>
+          <a:chExt cx="0" cy="0"/>
+        </a:xfrm>
+      </p:grpSpPr>
+      <p:sp>
+        <p:nvSpPr>
+          <p:cNvPr id="2" name="Rectangle 1">
+            <a:extLst>
+              <a:ext uri="{FF2B5EF4-FFF2-40B4-BE49-F238E27FC236}">
+                <a16:creationId xmlns:a16="http://schemas.microsoft.com/office/drawing/2014/main" id="{E0A4A5F9-2B53-7438-6237-9B1FB207775F}"/>
+              </a:ext>
+            </a:extLst>
+          </p:cNvPr>
+          <p:cNvSpPr/>
+          <p:nvPr/>
+        </p:nvSpPr>
+        <p:spPr>
+          <a:xfrm>
+            <a:off x="0" y="0"/>
+            <a:ext cx="12191695" cy="6858000"/>
+          </a:xfrm>
+          <a:prstGeom prst="rect">
+            <a:avLst/>
+          </a:prstGeom>
+          <a:solidFill>
+            <a:srgbClr val="FFFFFF"/>
+          </a:solidFill>
+          <a:ln>
+            <a:noFill/>
+          </a:ln>
+          <a:effectLst/>
+        </p:spPr>
+        <p:style>
+          <a:lnRef idx="1">
+            <a:schemeClr val="accent1"/>
+          </a:lnRef>
+          <a:fillRef idx="3">
+            <a:schemeClr val="accent1"/>
+          </a:fillRef>
+          <a:effectRef idx="2">
+            <a:schemeClr val="accent1"/>
+          </a:effectRef>
+          <a:fontRef idx="minor">
+            <a:schemeClr val="lt1"/>
+          </a:fontRef>
+        </p:style>
+        <p:txBody>
+          <a:bodyPr rtlCol="0" anchor="ctr"/>
+          <a:lstStyle/>
+          <a:p>
+            <a:pPr algn="ctr"/>
+            <a:endParaRPr/>
+          </a:p>
+        </p:txBody>
+      </p:sp>
+      <p:sp>
+        <p:nvSpPr>
+          <p:cNvPr id="3" name="Rectangle 2">
+            <a:extLst>
+              <a:ext uri="{FF2B5EF4-FFF2-40B4-BE49-F238E27FC236}">
+                <a16:creationId xmlns:a16="http://schemas.microsoft.com/office/drawing/2014/main" id="{DB111C67-0E59-5F3B-E845-61E90B583307}"/>
+              </a:ext>
+            </a:extLst>
+          </p:cNvPr>
+          <p:cNvSpPr/>
+          <p:nvPr/>
+        </p:nvSpPr>
+        <p:spPr>
+          <a:xfrm>
+            <a:off x="0" y="0"/>
+            <a:ext cx="12191695" cy="6858000"/>
+          </a:xfrm>
+          <a:prstGeom prst="rect">
+            <a:avLst/>
+          </a:prstGeom>
+          <a:solidFill>
+            <a:srgbClr val="F5F8FB"/>
+          </a:solidFill>
+          <a:ln>
+            <a:noFill/>
+          </a:ln>
+          <a:effectLst/>
+        </p:spPr>
+        <p:style>
+          <a:lnRef idx="1">
+            <a:schemeClr val="accent1"/>
+          </a:lnRef>
+          <a:fillRef idx="3">
+            <a:schemeClr val="accent1"/>
+          </a:fillRef>
+          <a:effectRef idx="2">
+            <a:schemeClr val="accent1"/>
+          </a:effectRef>
+          <a:fontRef idx="minor">
+            <a:schemeClr val="lt1"/>
+          </a:fontRef>
+        </p:style>
+        <p:txBody>
+          <a:bodyPr rtlCol="0" anchor="ctr"/>
+          <a:lstStyle/>
+          <a:p>
+            <a:pPr algn="ctr"/>
+            <a:endParaRPr/>
+          </a:p>
+        </p:txBody>
+      </p:sp>
+      <p:sp>
+        <p:nvSpPr>
+          <p:cNvPr id="4" name="Rectangle 3">
+            <a:extLst>
+              <a:ext uri="{FF2B5EF4-FFF2-40B4-BE49-F238E27FC236}">
+                <a16:creationId xmlns:a16="http://schemas.microsoft.com/office/drawing/2014/main" id="{DFD29A5C-D274-E2C6-D27C-1EA7D5BA87BA}"/>
+              </a:ext>
+            </a:extLst>
+          </p:cNvPr>
+          <p:cNvSpPr/>
+          <p:nvPr/>
+        </p:nvSpPr>
+        <p:spPr>
+          <a:xfrm>
+            <a:off x="0" y="6781800"/>
+            <a:ext cx="12191695" cy="76200"/>
+          </a:xfrm>
+          <a:prstGeom prst="rect">
+            <a:avLst/>
+          </a:prstGeom>
+          <a:solidFill>
+            <a:srgbClr val="2563EB"/>
+          </a:solidFill>
+          <a:ln>
+            <a:noFill/>
+          </a:ln>
+          <a:effectLst/>
+        </p:spPr>
+        <p:style>
+          <a:lnRef idx="1">
+            <a:schemeClr val="accent1"/>
+          </a:lnRef>
+          <a:fillRef idx="3">
+            <a:schemeClr val="accent1"/>
+          </a:fillRef>
+          <a:effectRef idx="2">
+            <a:schemeClr val="accent1"/>
+          </a:effectRef>
+          <a:fontRef idx="minor">
+            <a:schemeClr val="lt1"/>
+          </a:fontRef>
+        </p:style>
+        <p:txBody>
+          <a:bodyPr rtlCol="0" anchor="ctr"/>
+          <a:lstStyle/>
+          <a:p>
+            <a:pPr algn="ctr"/>
+            <a:endParaRPr/>
+          </a:p>
+        </p:txBody>
+      </p:sp>
+      <p:sp>
+        <p:nvSpPr>
+          <p:cNvPr id="5" name="TextBox 4">
+            <a:extLst>
+              <a:ext uri="{FF2B5EF4-FFF2-40B4-BE49-F238E27FC236}">
+                <a16:creationId xmlns:a16="http://schemas.microsoft.com/office/drawing/2014/main" id="{C74D29E2-94DE-4AFF-C18C-DF54FDAD850D}"/>
+              </a:ext>
+            </a:extLst>
+          </p:cNvPr>
+          <p:cNvSpPr txBox="1"/>
+          <p:nvPr/>
+        </p:nvSpPr>
+        <p:spPr>
+          <a:xfrm>
+            <a:off x="822960" y="2331720"/>
+            <a:ext cx="9144000" cy="457200"/>
+          </a:xfrm>
+          <a:prstGeom prst="rect">
+            <a:avLst/>
+          </a:prstGeom>
+          <a:noFill/>
+        </p:spPr>
+        <p:txBody>
+          <a:bodyPr wrap="square">
+            <a:spAutoFit/>
+          </a:bodyPr>
+          <a:lstStyle/>
+          <a:p>
+            <a:pPr algn="l">
+              <a:lnSpc>
+                <a:spcPct val="115000"/>
+              </a:lnSpc>
+              <a:spcAft>
+                <a:spcPts val="600"/>
+              </a:spcAft>
+            </a:pPr>
+            <a:r>
+              <a:rPr sz="1500" b="1">
+                <a:solidFill>
+                  <a:srgbClr val="2563EB"/>
+                </a:solidFill>
+                <a:latin typeface="맑은 고딕"/>
+              </a:rPr>
+              <a:t>TEAM AURIX  ·  TURTLEBOT3 · ROS2 HUMBLE · PYQT5</a:t>
+            </a:r>
+          </a:p>
+        </p:txBody>
+      </p:sp>
+      <p:sp>
+        <p:nvSpPr>
+          <p:cNvPr id="6" name="TextBox 5">
+            <a:extLst>
+              <a:ext uri="{FF2B5EF4-FFF2-40B4-BE49-F238E27FC236}">
+                <a16:creationId xmlns:a16="http://schemas.microsoft.com/office/drawing/2014/main" id="{103C6F1E-FD6E-C8AB-7D7C-954DDFA6C1A0}"/>
+              </a:ext>
+            </a:extLst>
+          </p:cNvPr>
+          <p:cNvSpPr txBox="1"/>
+          <p:nvPr/>
+        </p:nvSpPr>
+        <p:spPr>
+          <a:xfrm>
+            <a:off x="777240" y="2743200"/>
+            <a:ext cx="10515600" cy="799386"/>
+          </a:xfrm>
+          <a:prstGeom prst="rect">
+            <a:avLst/>
+          </a:prstGeom>
+          <a:noFill/>
+        </p:spPr>
+        <p:txBody>
+          <a:bodyPr wrap="square">
+            <a:spAutoFit/>
+          </a:bodyPr>
+          <a:lstStyle/>
+          <a:p>
+            <a:pPr algn="l">
+              <a:lnSpc>
+                <a:spcPct val="115000"/>
+              </a:lnSpc>
+              <a:spcAft>
+                <a:spcPts val="600"/>
+              </a:spcAft>
+            </a:pPr>
+            <a:r>
+              <a:rPr lang="ko-KR" altLang="en-US" sz="4400" b="1" dirty="0">
+                <a:solidFill>
+                  <a:srgbClr val="10192B"/>
+                </a:solidFill>
+                <a:latin typeface="맑은 고딕"/>
+              </a:rPr>
+              <a:t>감사합니다</a:t>
+            </a:r>
+            <a:r>
+              <a:rPr lang="en-US" altLang="ko-KR" sz="4400" b="1" dirty="0">
+                <a:solidFill>
+                  <a:srgbClr val="10192B"/>
+                </a:solidFill>
+                <a:latin typeface="맑은 고딕"/>
+              </a:rPr>
+              <a:t>.</a:t>
+            </a:r>
+            <a:endParaRPr sz="4400" b="1" dirty="0">
+              <a:solidFill>
+                <a:srgbClr val="10192B"/>
+              </a:solidFill>
+              <a:latin typeface="맑은 고딕"/>
+            </a:endParaRPr>
+          </a:p>
+        </p:txBody>
+      </p:sp>
+      <p:sp>
+        <p:nvSpPr>
+          <p:cNvPr id="7" name="TextBox 6">
+            <a:extLst>
+              <a:ext uri="{FF2B5EF4-FFF2-40B4-BE49-F238E27FC236}">
+                <a16:creationId xmlns:a16="http://schemas.microsoft.com/office/drawing/2014/main" id="{F4A9A4AC-331A-3562-1B4A-65A1497DA2F5}"/>
+              </a:ext>
+            </a:extLst>
+          </p:cNvPr>
+          <p:cNvSpPr txBox="1"/>
+          <p:nvPr/>
+        </p:nvSpPr>
+        <p:spPr>
+          <a:xfrm>
+            <a:off x="822960" y="3703320"/>
+            <a:ext cx="9601200" cy="731520"/>
+          </a:xfrm>
+          <a:prstGeom prst="rect">
+            <a:avLst/>
+          </a:prstGeom>
+          <a:noFill/>
+        </p:spPr>
+        <p:txBody>
+          <a:bodyPr wrap="square">
+            <a:spAutoFit/>
+          </a:bodyPr>
+          <a:lstStyle/>
+          <a:p>
+            <a:pPr algn="l">
+              <a:lnSpc>
+                <a:spcPct val="115000"/>
+              </a:lnSpc>
+              <a:spcAft>
+                <a:spcPts val="600"/>
+              </a:spcAft>
+            </a:pPr>
+            <a:r>
+              <a:rPr sz="1800" b="0" dirty="0" err="1">
+                <a:solidFill>
+                  <a:srgbClr val="64748B"/>
+                </a:solidFill>
+                <a:latin typeface="맑은 고딕"/>
+              </a:rPr>
+              <a:t>로봇</a:t>
+            </a:r>
+            <a:r>
+              <a:rPr sz="1800" b="0" dirty="0">
+                <a:solidFill>
+                  <a:srgbClr val="64748B"/>
+                </a:solidFill>
+                <a:latin typeface="맑은 고딕"/>
+              </a:rPr>
+              <a:t> </a:t>
+            </a:r>
+            <a:r>
+              <a:rPr sz="1800" b="0" dirty="0" err="1">
+                <a:solidFill>
+                  <a:srgbClr val="64748B"/>
+                </a:solidFill>
+                <a:latin typeface="맑은 고딕"/>
+              </a:rPr>
+              <a:t>상태</a:t>
+            </a:r>
+            <a:r>
+              <a:rPr sz="1800" b="0" dirty="0">
+                <a:solidFill>
+                  <a:srgbClr val="64748B"/>
+                </a:solidFill>
+                <a:latin typeface="맑은 고딕"/>
+              </a:rPr>
+              <a:t> </a:t>
+            </a:r>
+            <a:r>
+              <a:rPr sz="1800" b="0" dirty="0" err="1">
+                <a:solidFill>
+                  <a:srgbClr val="64748B"/>
+                </a:solidFill>
+                <a:latin typeface="맑은 고딕"/>
+              </a:rPr>
+              <a:t>모니터링</a:t>
+            </a:r>
+            <a:r>
+              <a:rPr sz="1800" b="0" dirty="0">
+                <a:solidFill>
+                  <a:srgbClr val="64748B"/>
+                </a:solidFill>
+                <a:latin typeface="맑은 고딕"/>
+              </a:rPr>
+              <a:t> · </a:t>
+            </a:r>
+            <a:r>
+              <a:rPr sz="1800" b="0" dirty="0" err="1">
+                <a:solidFill>
+                  <a:srgbClr val="64748B"/>
+                </a:solidFill>
+                <a:latin typeface="맑은 고딕"/>
+              </a:rPr>
+              <a:t>수동</a:t>
+            </a:r>
+            <a:r>
+              <a:rPr sz="1800" b="0" dirty="0">
+                <a:solidFill>
+                  <a:srgbClr val="64748B"/>
+                </a:solidFill>
+                <a:latin typeface="맑은 고딕"/>
+              </a:rPr>
+              <a:t>/</a:t>
+            </a:r>
+            <a:r>
+              <a:rPr sz="1800" b="0" dirty="0" err="1">
+                <a:solidFill>
+                  <a:srgbClr val="64748B"/>
+                </a:solidFill>
+                <a:latin typeface="맑은 고딕"/>
+              </a:rPr>
+              <a:t>자율</a:t>
+            </a:r>
+            <a:r>
+              <a:rPr sz="1800" b="0" dirty="0">
+                <a:solidFill>
+                  <a:srgbClr val="64748B"/>
+                </a:solidFill>
+                <a:latin typeface="맑은 고딕"/>
+              </a:rPr>
+              <a:t> </a:t>
+            </a:r>
+            <a:r>
+              <a:rPr sz="1800" b="0" dirty="0" err="1">
+                <a:solidFill>
+                  <a:srgbClr val="64748B"/>
+                </a:solidFill>
+                <a:latin typeface="맑은 고딕"/>
+              </a:rPr>
+              <a:t>주행</a:t>
+            </a:r>
+            <a:r>
+              <a:rPr sz="1800" b="0" dirty="0">
+                <a:solidFill>
+                  <a:srgbClr val="64748B"/>
+                </a:solidFill>
+                <a:latin typeface="맑은 고딕"/>
+              </a:rPr>
+              <a:t> </a:t>
+            </a:r>
+            <a:r>
+              <a:rPr sz="1800" b="0" dirty="0" err="1">
+                <a:solidFill>
+                  <a:srgbClr val="64748B"/>
+                </a:solidFill>
+                <a:latin typeface="맑은 고딕"/>
+              </a:rPr>
+              <a:t>제어를</a:t>
+            </a:r>
+            <a:r>
+              <a:rPr sz="1800" b="0" dirty="0">
+                <a:solidFill>
+                  <a:srgbClr val="64748B"/>
+                </a:solidFill>
+                <a:latin typeface="맑은 고딕"/>
+              </a:rPr>
+              <a:t> </a:t>
+            </a:r>
+            <a:r>
+              <a:rPr sz="1800" b="0" dirty="0" err="1">
+                <a:solidFill>
+                  <a:srgbClr val="64748B"/>
+                </a:solidFill>
+                <a:latin typeface="맑은 고딕"/>
+              </a:rPr>
+              <a:t>하나로</a:t>
+            </a:r>
+            <a:r>
+              <a:rPr sz="1800" b="0" dirty="0">
+                <a:solidFill>
+                  <a:srgbClr val="64748B"/>
+                </a:solidFill>
+                <a:latin typeface="맑은 고딕"/>
+              </a:rPr>
+              <a:t> </a:t>
+            </a:r>
+            <a:r>
+              <a:rPr sz="1800" b="0" dirty="0" err="1">
+                <a:solidFill>
+                  <a:srgbClr val="64748B"/>
+                </a:solidFill>
+                <a:latin typeface="맑은 고딕"/>
+              </a:rPr>
+              <a:t>통합한</a:t>
+            </a:r>
+            <a:r>
+              <a:rPr sz="1800" b="0" dirty="0">
+                <a:solidFill>
+                  <a:srgbClr val="64748B"/>
+                </a:solidFill>
+                <a:latin typeface="맑은 고딕"/>
+              </a:rPr>
+              <a:t> </a:t>
+            </a:r>
+            <a:r>
+              <a:rPr sz="1800" b="0" dirty="0" err="1">
+                <a:solidFill>
+                  <a:srgbClr val="64748B"/>
+                </a:solidFill>
+                <a:latin typeface="맑은 고딕"/>
+              </a:rPr>
+              <a:t>데스크톱</a:t>
+            </a:r>
+            <a:r>
+              <a:rPr sz="1800" b="0" dirty="0">
+                <a:solidFill>
+                  <a:srgbClr val="64748B"/>
+                </a:solidFill>
+                <a:latin typeface="맑은 고딕"/>
+              </a:rPr>
+              <a:t> </a:t>
+            </a:r>
+            <a:r>
+              <a:rPr sz="1800" b="0" dirty="0" err="1">
+                <a:solidFill>
+                  <a:srgbClr val="64748B"/>
+                </a:solidFill>
+                <a:latin typeface="맑은 고딕"/>
+              </a:rPr>
+              <a:t>대시보드</a:t>
+            </a:r>
+            <a:endParaRPr sz="1800" b="0" dirty="0">
+              <a:solidFill>
+                <a:srgbClr val="64748B"/>
+              </a:solidFill>
+              <a:latin typeface="맑은 고딕"/>
+            </a:endParaRPr>
+          </a:p>
+        </p:txBody>
+      </p:sp>
+      <p:sp>
+        <p:nvSpPr>
+          <p:cNvPr id="8" name="Rectangle 7">
+            <a:extLst>
+              <a:ext uri="{FF2B5EF4-FFF2-40B4-BE49-F238E27FC236}">
+                <a16:creationId xmlns:a16="http://schemas.microsoft.com/office/drawing/2014/main" id="{9C4881ED-A532-4564-025F-29A620564FFF}"/>
+              </a:ext>
+            </a:extLst>
+          </p:cNvPr>
+          <p:cNvSpPr/>
+          <p:nvPr/>
+        </p:nvSpPr>
+        <p:spPr>
+          <a:xfrm>
+            <a:off x="822960" y="4343400"/>
+            <a:ext cx="914400" cy="50800"/>
+          </a:xfrm>
+          <a:prstGeom prst="rect">
+            <a:avLst/>
+          </a:prstGeom>
+          <a:solidFill>
+            <a:srgbClr val="2563EB"/>
+          </a:solidFill>
+          <a:ln>
+            <a:noFill/>
+          </a:ln>
+          <a:effectLst/>
+        </p:spPr>
+        <p:style>
+          <a:lnRef idx="1">
+            <a:schemeClr val="accent1"/>
+          </a:lnRef>
+          <a:fillRef idx="3">
+            <a:schemeClr val="accent1"/>
+          </a:fillRef>
+          <a:effectRef idx="2">
+            <a:schemeClr val="accent1"/>
+          </a:effectRef>
+          <a:fontRef idx="minor">
+            <a:schemeClr val="lt1"/>
+          </a:fontRef>
+        </p:style>
+        <p:txBody>
+          <a:bodyPr rtlCol="0" anchor="ctr"/>
+          <a:lstStyle/>
+          <a:p>
+            <a:pPr algn="ctr"/>
+            <a:endParaRPr/>
+          </a:p>
+        </p:txBody>
+      </p:sp>
+      <p:sp>
+        <p:nvSpPr>
+          <p:cNvPr id="11" name="TextBox 10">
+            <a:extLst>
+              <a:ext uri="{FF2B5EF4-FFF2-40B4-BE49-F238E27FC236}">
+                <a16:creationId xmlns:a16="http://schemas.microsoft.com/office/drawing/2014/main" id="{843CCE21-F333-6413-F918-31D2F6599220}"/>
+              </a:ext>
+            </a:extLst>
+          </p:cNvPr>
+          <p:cNvSpPr txBox="1"/>
+          <p:nvPr/>
+        </p:nvSpPr>
+        <p:spPr>
+          <a:xfrm>
+            <a:off x="10637215" y="201168"/>
+            <a:ext cx="1325880" cy="320040"/>
+          </a:xfrm>
+          <a:prstGeom prst="rect">
+            <a:avLst/>
+          </a:prstGeom>
+          <a:noFill/>
+        </p:spPr>
+        <p:txBody>
+          <a:bodyPr wrap="none">
+            <a:spAutoFit/>
+          </a:bodyPr>
+          <a:lstStyle/>
+          <a:p>
+            <a:pPr algn="r"/>
+            <a:r>
+              <a:rPr sz="1200" b="1">
+                <a:solidFill>
+                  <a:srgbClr val="64748B"/>
+                </a:solidFill>
+                <a:latin typeface="맑은 고딕"/>
+              </a:rPr>
+              <a:t>AURIX</a:t>
+            </a:r>
+          </a:p>
+        </p:txBody>
+      </p:sp>
+      <p:sp>
+        <p:nvSpPr>
+          <p:cNvPr id="90001" name="Watermark AURIX">
+            <a:extLst>
+              <a:ext uri="{FF2B5EF4-FFF2-40B4-BE49-F238E27FC236}">
+                <a16:creationId xmlns:a16="http://schemas.microsoft.com/office/drawing/2014/main" id="{2038FE60-C9F0-1A82-B9D9-73D73EA17505}"/>
+              </a:ext>
+            </a:extLst>
+          </p:cNvPr>
+          <p:cNvSpPr txBox="1"/>
+          <p:nvPr userDrawn="1"/>
+        </p:nvSpPr>
+        <p:spPr>
+          <a:xfrm rot="18300000">
+            <a:off x="2596000" y="2529000"/>
+            <a:ext cx="7000000" cy="1800000"/>
+          </a:xfrm>
+          <a:prstGeom prst="rect">
+            <a:avLst/>
+          </a:prstGeom>
+          <a:noFill/>
+        </p:spPr>
+        <p:txBody>
+          <a:bodyPr wrap="square" anchor="ctr" anchorCtr="1">
+            <a:noAutofit/>
+          </a:bodyPr>
+          <a:lstStyle/>
+          <a:p>
+            <a:pPr algn="ctr"/>
+            <a:r>
+              <a:rPr lang="en-US" sz="8000" b="1">
+                <a:solidFill>
+                  <a:srgbClr val="808080">
+                    <a:alpha val="25000"/>
+                  </a:srgbClr>
+                </a:solidFill>
+                <a:latin typeface="Arial"/>
+              </a:rPr>
+              <a:t>AURIX</a:t>
+            </a:r>
+          </a:p>
+        </p:txBody>
+      </p:sp>
+    </p:spTree>
+    <p:extLst>
+      <p:ext uri="{BB962C8B-B14F-4D97-AF65-F5344CB8AC3E}">
+        <p14:creationId xmlns:p14="http://schemas.microsoft.com/office/powerpoint/2010/main" val="750972393"/>
+      </p:ext>
+    </p:extLst>
+  </p:cSld>
+  <p:clrMapOvr>
+    <a:masterClrMapping/>
+  </p:clrMapOvr>
+</p:sld>
+</file>
+
 <file path=ppt/slides/slide3.xml><?xml version="1.0" encoding="utf-8"?>
-<p:sld xmlns:a="http://schemas.openxmlformats.org/drawingml/2006/main" xmlns:p="http://schemas.openxmlformats.org/presentationml/2006/main" xmlns:r="http://schemas.openxmlformats.org/officeDocument/2006/relationships">
+<p:sld xmlns:a="http://schemas.openxmlformats.org/drawingml/2006/main" xmlns:r="http://schemas.openxmlformats.org/officeDocument/2006/relationships" xmlns:p="http://schemas.openxmlformats.org/presentationml/2006/main">
   <p:cSld>
     <p:spTree>
       <p:nvGrpSpPr>
@@ -16359,7 +17990,14 @@
         <p:cNvGrpSpPr/>
         <p:nvPr/>
       </p:nvGrpSpPr>
-      <p:grpSpPr/>
+      <p:grpSpPr>
+        <a:xfrm>
+          <a:off x="0" y="0"/>
+          <a:ext cx="0" cy="0"/>
+          <a:chOff x="0" y="0"/>
+          <a:chExt cx="0" cy="0"/>
+        </a:xfrm>
+      </p:grpSpPr>
       <p:sp>
         <p:nvSpPr>
           <p:cNvPr id="2" name="Rectangle 1"/>
@@ -16401,6 +18039,7 @@
           <a:lstStyle/>
           <a:p>
             <a:pPr algn="ctr"/>
+            <a:endParaRPr/>
           </a:p>
         </p:txBody>
       </p:sp>
@@ -16529,6 +18168,7 @@
           <a:lstStyle/>
           <a:p>
             <a:pPr algn="ctr"/>
+            <a:endParaRPr/>
           </a:p>
         </p:txBody>
       </p:sp>
@@ -16638,6 +18278,7 @@
           <a:lstStyle/>
           <a:p>
             <a:pPr algn="ctr"/>
+            <a:endParaRPr/>
           </a:p>
         </p:txBody>
       </p:sp>
@@ -16770,6 +18411,7 @@
           <a:lstStyle/>
           <a:p>
             <a:pPr algn="ctr"/>
+            <a:endParaRPr/>
           </a:p>
         </p:txBody>
       </p:sp>
@@ -16902,6 +18544,7 @@
           <a:lstStyle/>
           <a:p>
             <a:pPr algn="ctr"/>
+            <a:endParaRPr/>
           </a:p>
         </p:txBody>
       </p:sp>
@@ -17034,6 +18677,7 @@
           <a:lstStyle/>
           <a:p>
             <a:pPr algn="ctr"/>
+            <a:endParaRPr/>
           </a:p>
         </p:txBody>
       </p:sp>
@@ -17234,6 +18878,43 @@
                   <a:srgbClr val="64748B"/>
                 </a:solidFill>
                 <a:latin typeface="맑은 고딕"/>
+              </a:rPr>
+              <a:t>AURIX</a:t>
+            </a:r>
+          </a:p>
+        </p:txBody>
+      </p:sp>
+      <p:sp>
+        <p:nvSpPr>
+          <p:cNvPr id="90001" name="Watermark AURIX"/>
+          <p:cNvSpPr txBox="1"/>
+          <p:nvPr userDrawn="1"/>
+        </p:nvSpPr>
+        <p:spPr>
+          <a:xfrm rot="18300000">
+            <a:off x="2596000" y="2529000"/>
+            <a:ext cx="7000000" cy="1800000"/>
+          </a:xfrm>
+          <a:prstGeom prst="rect">
+            <a:avLst/>
+          </a:prstGeom>
+          <a:noFill/>
+        </p:spPr>
+        <p:txBody>
+          <a:bodyPr wrap="square" anchor="ctr" anchorCtr="1">
+            <a:noAutofit/>
+          </a:bodyPr>
+          <a:lstStyle/>
+          <a:p>
+            <a:pPr algn="ctr"/>
+            <a:r>
+              <a:rPr lang="en-US" sz="8000" b="1">
+                <a:solidFill>
+                  <a:srgbClr val="808080">
+                    <a:alpha val="25000"/>
+                  </a:srgbClr>
+                </a:solidFill>
+                <a:latin typeface="Arial"/>
               </a:rPr>
               <a:t>AURIX</a:t>
             </a:r>
@@ -17249,7 +18930,7 @@
 </file>
 
 <file path=ppt/slides/slide4.xml><?xml version="1.0" encoding="utf-8"?>
-<p:sld xmlns:a="http://schemas.openxmlformats.org/drawingml/2006/main" xmlns:p="http://schemas.openxmlformats.org/presentationml/2006/main" xmlns:r="http://schemas.openxmlformats.org/officeDocument/2006/relationships">
+<p:sld xmlns:a="http://schemas.openxmlformats.org/drawingml/2006/main" xmlns:r="http://schemas.openxmlformats.org/officeDocument/2006/relationships" xmlns:p="http://schemas.openxmlformats.org/presentationml/2006/main">
   <p:cSld>
     <p:spTree>
       <p:nvGrpSpPr>
@@ -17257,7 +18938,14 @@
         <p:cNvGrpSpPr/>
         <p:nvPr/>
       </p:nvGrpSpPr>
-      <p:grpSpPr/>
+      <p:grpSpPr>
+        <a:xfrm>
+          <a:off x="0" y="0"/>
+          <a:ext cx="0" cy="0"/>
+          <a:chOff x="0" y="0"/>
+          <a:chExt cx="0" cy="0"/>
+        </a:xfrm>
+      </p:grpSpPr>
       <p:sp>
         <p:nvSpPr>
           <p:cNvPr id="2" name="Rectangle 1"/>
@@ -17299,6 +18987,7 @@
           <a:lstStyle/>
           <a:p>
             <a:pPr algn="ctr"/>
+            <a:endParaRPr/>
           </a:p>
         </p:txBody>
       </p:sp>
@@ -17427,6 +19116,7 @@
           <a:lstStyle/>
           <a:p>
             <a:pPr algn="ctr"/>
+            <a:endParaRPr/>
           </a:p>
         </p:txBody>
       </p:sp>
@@ -17473,6 +19163,7 @@
           <a:lstStyle/>
           <a:p>
             <a:pPr algn="ctr"/>
+            <a:endParaRPr/>
           </a:p>
         </p:txBody>
       </p:sp>
@@ -17603,6 +19294,7 @@
           <a:lstStyle/>
           <a:p>
             <a:pPr algn="ctr"/>
+            <a:endParaRPr/>
           </a:p>
         </p:txBody>
       </p:sp>
@@ -17733,6 +19425,7 @@
           <a:lstStyle/>
           <a:p>
             <a:pPr algn="ctr"/>
+            <a:endParaRPr/>
           </a:p>
         </p:txBody>
       </p:sp>
@@ -17863,6 +19556,7 @@
           <a:lstStyle/>
           <a:p>
             <a:pPr algn="ctr"/>
+            <a:endParaRPr/>
           </a:p>
         </p:txBody>
       </p:sp>
@@ -17993,6 +19687,7 @@
           <a:lstStyle/>
           <a:p>
             <a:pPr algn="ctr"/>
+            <a:endParaRPr/>
           </a:p>
         </p:txBody>
       </p:sp>
@@ -18123,6 +19818,7 @@
           <a:lstStyle/>
           <a:p>
             <a:pPr algn="ctr"/>
+            <a:endParaRPr/>
           </a:p>
         </p:txBody>
       </p:sp>
@@ -18323,6 +20019,43 @@
                   <a:srgbClr val="64748B"/>
                 </a:solidFill>
                 <a:latin typeface="맑은 고딕"/>
+              </a:rPr>
+              <a:t>AURIX</a:t>
+            </a:r>
+          </a:p>
+        </p:txBody>
+      </p:sp>
+      <p:sp>
+        <p:nvSpPr>
+          <p:cNvPr id="90001" name="Watermark AURIX"/>
+          <p:cNvSpPr txBox="1"/>
+          <p:nvPr userDrawn="1"/>
+        </p:nvSpPr>
+        <p:spPr>
+          <a:xfrm rot="18300000">
+            <a:off x="2596000" y="2529000"/>
+            <a:ext cx="7000000" cy="1800000"/>
+          </a:xfrm>
+          <a:prstGeom prst="rect">
+            <a:avLst/>
+          </a:prstGeom>
+          <a:noFill/>
+        </p:spPr>
+        <p:txBody>
+          <a:bodyPr wrap="square" anchor="ctr" anchorCtr="1">
+            <a:noAutofit/>
+          </a:bodyPr>
+          <a:lstStyle/>
+          <a:p>
+            <a:pPr algn="ctr"/>
+            <a:r>
+              <a:rPr lang="en-US" sz="8000" b="1">
+                <a:solidFill>
+                  <a:srgbClr val="808080">
+                    <a:alpha val="25000"/>
+                  </a:srgbClr>
+                </a:solidFill>
+                <a:latin typeface="Arial"/>
               </a:rPr>
               <a:t>AURIX</a:t>
             </a:r>
@@ -18338,7 +20071,7 @@
 </file>
 
 <file path=ppt/slides/slide5.xml><?xml version="1.0" encoding="utf-8"?>
-<p:sld xmlns:a="http://schemas.openxmlformats.org/drawingml/2006/main" xmlns:p="http://schemas.openxmlformats.org/presentationml/2006/main" xmlns:r="http://schemas.openxmlformats.org/officeDocument/2006/relationships">
+<p:sld xmlns:a="http://schemas.openxmlformats.org/drawingml/2006/main" xmlns:r="http://schemas.openxmlformats.org/officeDocument/2006/relationships" xmlns:p="http://schemas.openxmlformats.org/presentationml/2006/main">
   <p:cSld>
     <p:spTree>
       <p:nvGrpSpPr>
@@ -18346,7 +20079,14 @@
         <p:cNvGrpSpPr/>
         <p:nvPr/>
       </p:nvGrpSpPr>
-      <p:grpSpPr/>
+      <p:grpSpPr>
+        <a:xfrm>
+          <a:off x="0" y="0"/>
+          <a:ext cx="0" cy="0"/>
+          <a:chOff x="0" y="0"/>
+          <a:chExt cx="0" cy="0"/>
+        </a:xfrm>
+      </p:grpSpPr>
       <p:sp>
         <p:nvSpPr>
           <p:cNvPr id="2" name="Rectangle 1"/>
@@ -18388,6 +20128,7 @@
           <a:lstStyle/>
           <a:p>
             <a:pPr algn="ctr"/>
+            <a:endParaRPr/>
           </a:p>
         </p:txBody>
       </p:sp>
@@ -18516,6 +20257,7 @@
           <a:lstStyle/>
           <a:p>
             <a:pPr algn="ctr"/>
+            <a:endParaRPr/>
           </a:p>
         </p:txBody>
       </p:sp>
@@ -18560,6 +20302,7 @@
           <a:lstStyle/>
           <a:p>
             <a:pPr algn="ctr"/>
+            <a:endParaRPr/>
           </a:p>
         </p:txBody>
       </p:sp>
@@ -18732,6 +20475,7 @@
           <a:lstStyle/>
           <a:p>
             <a:pPr algn="ctr"/>
+            <a:endParaRPr/>
           </a:p>
         </p:txBody>
       </p:sp>
@@ -18904,6 +20648,7 @@
           <a:lstStyle/>
           <a:p>
             <a:pPr algn="ctr"/>
+            <a:endParaRPr/>
           </a:p>
         </p:txBody>
       </p:sp>
@@ -19076,6 +20821,7 @@
           <a:lstStyle/>
           <a:p>
             <a:pPr algn="ctr"/>
+            <a:endParaRPr/>
           </a:p>
         </p:txBody>
       </p:sp>
@@ -19248,6 +20994,7 @@
           <a:lstStyle/>
           <a:p>
             <a:pPr algn="ctr"/>
+            <a:endParaRPr/>
           </a:p>
         </p:txBody>
       </p:sp>
@@ -19420,6 +21167,7 @@
           <a:lstStyle/>
           <a:p>
             <a:pPr algn="ctr"/>
+            <a:endParaRPr/>
           </a:p>
         </p:txBody>
       </p:sp>
@@ -19592,6 +21340,7 @@
           <a:lstStyle/>
           <a:p>
             <a:pPr algn="ctr"/>
+            <a:endParaRPr/>
           </a:p>
         </p:txBody>
       </p:sp>
@@ -19764,6 +21513,7 @@
           <a:lstStyle/>
           <a:p>
             <a:pPr algn="ctr"/>
+            <a:endParaRPr/>
           </a:p>
         </p:txBody>
       </p:sp>
@@ -19936,6 +21686,7 @@
           <a:lstStyle/>
           <a:p>
             <a:pPr algn="ctr"/>
+            <a:endParaRPr/>
           </a:p>
         </p:txBody>
       </p:sp>
@@ -20178,6 +21929,43 @@
                   <a:srgbClr val="64748B"/>
                 </a:solidFill>
                 <a:latin typeface="맑은 고딕"/>
+              </a:rPr>
+              <a:t>AURIX</a:t>
+            </a:r>
+          </a:p>
+        </p:txBody>
+      </p:sp>
+      <p:sp>
+        <p:nvSpPr>
+          <p:cNvPr id="90001" name="Watermark AURIX"/>
+          <p:cNvSpPr txBox="1"/>
+          <p:nvPr userDrawn="1"/>
+        </p:nvSpPr>
+        <p:spPr>
+          <a:xfrm rot="18300000">
+            <a:off x="2596000" y="2529000"/>
+            <a:ext cx="7000000" cy="1800000"/>
+          </a:xfrm>
+          <a:prstGeom prst="rect">
+            <a:avLst/>
+          </a:prstGeom>
+          <a:noFill/>
+        </p:spPr>
+        <p:txBody>
+          <a:bodyPr wrap="square" anchor="ctr" anchorCtr="1">
+            <a:noAutofit/>
+          </a:bodyPr>
+          <a:lstStyle/>
+          <a:p>
+            <a:pPr algn="ctr"/>
+            <a:r>
+              <a:rPr lang="en-US" sz="8000" b="1">
+                <a:solidFill>
+                  <a:srgbClr val="808080">
+                    <a:alpha val="25000"/>
+                  </a:srgbClr>
+                </a:solidFill>
+                <a:latin typeface="Arial"/>
               </a:rPr>
               <a:t>AURIX</a:t>
             </a:r>
@@ -20193,7 +21981,7 @@
 </file>
 
 <file path=ppt/slides/slide6.xml><?xml version="1.0" encoding="utf-8"?>
-<p:sld xmlns:a="http://schemas.openxmlformats.org/drawingml/2006/main" xmlns:p="http://schemas.openxmlformats.org/presentationml/2006/main" xmlns:r="http://schemas.openxmlformats.org/officeDocument/2006/relationships">
+<p:sld xmlns:a="http://schemas.openxmlformats.org/drawingml/2006/main" xmlns:r="http://schemas.openxmlformats.org/officeDocument/2006/relationships" xmlns:p="http://schemas.openxmlformats.org/presentationml/2006/main">
   <p:cSld>
     <p:spTree>
       <p:nvGrpSpPr>
@@ -20201,7 +21989,14 @@
         <p:cNvGrpSpPr/>
         <p:nvPr/>
       </p:nvGrpSpPr>
-      <p:grpSpPr/>
+      <p:grpSpPr>
+        <a:xfrm>
+          <a:off x="0" y="0"/>
+          <a:ext cx="0" cy="0"/>
+          <a:chOff x="0" y="0"/>
+          <a:chExt cx="0" cy="0"/>
+        </a:xfrm>
+      </p:grpSpPr>
       <p:sp>
         <p:nvSpPr>
           <p:cNvPr id="2" name="Rectangle 1"/>
@@ -20243,6 +22038,7 @@
           <a:lstStyle/>
           <a:p>
             <a:pPr algn="ctr"/>
+            <a:endParaRPr/>
           </a:p>
         </p:txBody>
       </p:sp>
@@ -20371,6 +22167,7 @@
           <a:lstStyle/>
           <a:p>
             <a:pPr algn="ctr"/>
+            <a:endParaRPr/>
           </a:p>
         </p:txBody>
       </p:sp>
@@ -20417,6 +22214,7 @@
           <a:lstStyle/>
           <a:p>
             <a:pPr algn="ctr"/>
+            <a:endParaRPr/>
           </a:p>
         </p:txBody>
       </p:sp>
@@ -20841,6 +22639,43 @@
                   <a:srgbClr val="64748B"/>
                 </a:solidFill>
                 <a:latin typeface="맑은 고딕"/>
+              </a:rPr>
+              <a:t>AURIX</a:t>
+            </a:r>
+          </a:p>
+        </p:txBody>
+      </p:sp>
+      <p:sp>
+        <p:nvSpPr>
+          <p:cNvPr id="90001" name="Watermark AURIX"/>
+          <p:cNvSpPr txBox="1"/>
+          <p:nvPr userDrawn="1"/>
+        </p:nvSpPr>
+        <p:spPr>
+          <a:xfrm rot="18300000">
+            <a:off x="2596000" y="2529000"/>
+            <a:ext cx="7000000" cy="1800000"/>
+          </a:xfrm>
+          <a:prstGeom prst="rect">
+            <a:avLst/>
+          </a:prstGeom>
+          <a:noFill/>
+        </p:spPr>
+        <p:txBody>
+          <a:bodyPr wrap="square" anchor="ctr" anchorCtr="1">
+            <a:noAutofit/>
+          </a:bodyPr>
+          <a:lstStyle/>
+          <a:p>
+            <a:pPr algn="ctr"/>
+            <a:r>
+              <a:rPr lang="en-US" sz="8000" b="1">
+                <a:solidFill>
+                  <a:srgbClr val="808080">
+                    <a:alpha val="25000"/>
+                  </a:srgbClr>
+                </a:solidFill>
+                <a:latin typeface="Arial"/>
               </a:rPr>
               <a:t>AURIX</a:t>
             </a:r>
@@ -20856,7 +22691,7 @@
 </file>
 
 <file path=ppt/slides/slide7.xml><?xml version="1.0" encoding="utf-8"?>
-<p:sld xmlns:a="http://schemas.openxmlformats.org/drawingml/2006/main" xmlns:p="http://schemas.openxmlformats.org/presentationml/2006/main" xmlns:r="http://schemas.openxmlformats.org/officeDocument/2006/relationships">
+<p:sld xmlns:a="http://schemas.openxmlformats.org/drawingml/2006/main" xmlns:r="http://schemas.openxmlformats.org/officeDocument/2006/relationships" xmlns:p="http://schemas.openxmlformats.org/presentationml/2006/main">
   <p:cSld>
     <p:spTree>
       <p:nvGrpSpPr>
@@ -20864,7 +22699,14 @@
         <p:cNvGrpSpPr/>
         <p:nvPr/>
       </p:nvGrpSpPr>
-      <p:grpSpPr/>
+      <p:grpSpPr>
+        <a:xfrm>
+          <a:off x="0" y="0"/>
+          <a:ext cx="0" cy="0"/>
+          <a:chOff x="0" y="0"/>
+          <a:chExt cx="0" cy="0"/>
+        </a:xfrm>
+      </p:grpSpPr>
       <p:sp>
         <p:nvSpPr>
           <p:cNvPr id="2" name="Rectangle 1"/>
@@ -20906,6 +22748,7 @@
           <a:lstStyle/>
           <a:p>
             <a:pPr algn="ctr"/>
+            <a:endParaRPr/>
           </a:p>
         </p:txBody>
       </p:sp>
@@ -21034,6 +22877,7 @@
           <a:lstStyle/>
           <a:p>
             <a:pPr algn="ctr"/>
+            <a:endParaRPr/>
           </a:p>
         </p:txBody>
       </p:sp>
@@ -21122,6 +22966,7 @@
           <a:lstStyle/>
           <a:p>
             <a:pPr algn="ctr"/>
+            <a:endParaRPr/>
           </a:p>
         </p:txBody>
       </p:sp>
@@ -21210,6 +23055,7 @@
           <a:lstStyle/>
           <a:p>
             <a:pPr algn="ctr"/>
+            <a:endParaRPr/>
           </a:p>
         </p:txBody>
       </p:sp>
@@ -21298,6 +23144,7 @@
           <a:lstStyle/>
           <a:p>
             <a:pPr algn="ctr"/>
+            <a:endParaRPr/>
           </a:p>
         </p:txBody>
       </p:sp>
@@ -21388,6 +23235,7 @@
           <a:lstStyle/>
           <a:p>
             <a:pPr algn="ctr"/>
+            <a:endParaRPr/>
           </a:p>
         </p:txBody>
       </p:sp>
@@ -21478,6 +23326,7 @@
           <a:lstStyle/>
           <a:p>
             <a:pPr algn="ctr"/>
+            <a:endParaRPr/>
           </a:p>
         </p:txBody>
       </p:sp>
@@ -21568,6 +23417,7 @@
           <a:lstStyle/>
           <a:p>
             <a:pPr algn="ctr"/>
+            <a:endParaRPr/>
           </a:p>
         </p:txBody>
       </p:sp>
@@ -21658,6 +23508,7 @@
           <a:lstStyle/>
           <a:p>
             <a:pPr algn="ctr"/>
+            <a:endParaRPr/>
           </a:p>
         </p:txBody>
       </p:sp>
@@ -21746,6 +23597,7 @@
           <a:lstStyle/>
           <a:p>
             <a:pPr algn="ctr"/>
+            <a:endParaRPr/>
           </a:p>
         </p:txBody>
       </p:sp>
@@ -21923,6 +23775,43 @@
                   <a:srgbClr val="64748B"/>
                 </a:solidFill>
                 <a:latin typeface="맑은 고딕"/>
+              </a:rPr>
+              <a:t>AURIX</a:t>
+            </a:r>
+          </a:p>
+        </p:txBody>
+      </p:sp>
+      <p:sp>
+        <p:nvSpPr>
+          <p:cNvPr id="90001" name="Watermark AURIX"/>
+          <p:cNvSpPr txBox="1"/>
+          <p:nvPr userDrawn="1"/>
+        </p:nvSpPr>
+        <p:spPr>
+          <a:xfrm rot="18300000">
+            <a:off x="2596000" y="2529000"/>
+            <a:ext cx="7000000" cy="1800000"/>
+          </a:xfrm>
+          <a:prstGeom prst="rect">
+            <a:avLst/>
+          </a:prstGeom>
+          <a:noFill/>
+        </p:spPr>
+        <p:txBody>
+          <a:bodyPr wrap="square" anchor="ctr" anchorCtr="1">
+            <a:noAutofit/>
+          </a:bodyPr>
+          <a:lstStyle/>
+          <a:p>
+            <a:pPr algn="ctr"/>
+            <a:r>
+              <a:rPr lang="en-US" sz="8000" b="1">
+                <a:solidFill>
+                  <a:srgbClr val="808080">
+                    <a:alpha val="25000"/>
+                  </a:srgbClr>
+                </a:solidFill>
+                <a:latin typeface="Arial"/>
               </a:rPr>
               <a:t>AURIX</a:t>
             </a:r>
@@ -21938,7 +23827,7 @@
 </file>
 
 <file path=ppt/slides/slide8.xml><?xml version="1.0" encoding="utf-8"?>
-<p:sld xmlns:a="http://schemas.openxmlformats.org/drawingml/2006/main" xmlns:p="http://schemas.openxmlformats.org/presentationml/2006/main" xmlns:r="http://schemas.openxmlformats.org/officeDocument/2006/relationships">
+<p:sld xmlns:a="http://schemas.openxmlformats.org/drawingml/2006/main" xmlns:r="http://schemas.openxmlformats.org/officeDocument/2006/relationships" xmlns:p="http://schemas.openxmlformats.org/presentationml/2006/main">
   <p:cSld>
     <p:spTree>
       <p:nvGrpSpPr>
@@ -21946,7 +23835,14 @@
         <p:cNvGrpSpPr/>
         <p:nvPr/>
       </p:nvGrpSpPr>
-      <p:grpSpPr/>
+      <p:grpSpPr>
+        <a:xfrm>
+          <a:off x="0" y="0"/>
+          <a:ext cx="0" cy="0"/>
+          <a:chOff x="0" y="0"/>
+          <a:chExt cx="0" cy="0"/>
+        </a:xfrm>
+      </p:grpSpPr>
       <p:sp>
         <p:nvSpPr>
           <p:cNvPr id="2" name="Rectangle 1"/>
@@ -21988,6 +23884,7 @@
           <a:lstStyle/>
           <a:p>
             <a:pPr algn="ctr"/>
+            <a:endParaRPr/>
           </a:p>
         </p:txBody>
       </p:sp>
@@ -22116,6 +24013,7 @@
           <a:lstStyle/>
           <a:p>
             <a:pPr algn="ctr"/>
+            <a:endParaRPr/>
           </a:p>
         </p:txBody>
       </p:sp>
@@ -22184,6 +24082,7 @@
           <a:lstStyle/>
           <a:p>
             <a:pPr algn="ctr"/>
+            <a:endParaRPr/>
           </a:p>
         </p:txBody>
       </p:sp>
@@ -22407,6 +24306,43 @@
                   <a:srgbClr val="64748B"/>
                 </a:solidFill>
                 <a:latin typeface="맑은 고딕"/>
+              </a:rPr>
+              <a:t>AURIX</a:t>
+            </a:r>
+          </a:p>
+        </p:txBody>
+      </p:sp>
+      <p:sp>
+        <p:nvSpPr>
+          <p:cNvPr id="90001" name="Watermark AURIX"/>
+          <p:cNvSpPr txBox="1"/>
+          <p:nvPr userDrawn="1"/>
+        </p:nvSpPr>
+        <p:spPr>
+          <a:xfrm rot="18300000">
+            <a:off x="2596000" y="2529000"/>
+            <a:ext cx="7000000" cy="1800000"/>
+          </a:xfrm>
+          <a:prstGeom prst="rect">
+            <a:avLst/>
+          </a:prstGeom>
+          <a:noFill/>
+        </p:spPr>
+        <p:txBody>
+          <a:bodyPr wrap="square" anchor="ctr" anchorCtr="1">
+            <a:noAutofit/>
+          </a:bodyPr>
+          <a:lstStyle/>
+          <a:p>
+            <a:pPr algn="ctr"/>
+            <a:r>
+              <a:rPr lang="en-US" sz="8000" b="1">
+                <a:solidFill>
+                  <a:srgbClr val="808080">
+                    <a:alpha val="25000"/>
+                  </a:srgbClr>
+                </a:solidFill>
+                <a:latin typeface="Arial"/>
               </a:rPr>
               <a:t>AURIX</a:t>
             </a:r>
@@ -22422,7 +24358,7 @@
 </file>
 
 <file path=ppt/slides/slide9.xml><?xml version="1.0" encoding="utf-8"?>
-<p:sld xmlns:a="http://schemas.openxmlformats.org/drawingml/2006/main" xmlns:p="http://schemas.openxmlformats.org/presentationml/2006/main" xmlns:r="http://schemas.openxmlformats.org/officeDocument/2006/relationships">
+<p:sld xmlns:a="http://schemas.openxmlformats.org/drawingml/2006/main" xmlns:r="http://schemas.openxmlformats.org/officeDocument/2006/relationships" xmlns:p="http://schemas.openxmlformats.org/presentationml/2006/main">
   <p:cSld>
     <p:spTree>
       <p:nvGrpSpPr>
@@ -22430,7 +24366,14 @@
         <p:cNvGrpSpPr/>
         <p:nvPr/>
       </p:nvGrpSpPr>
-      <p:grpSpPr/>
+      <p:grpSpPr>
+        <a:xfrm>
+          <a:off x="0" y="0"/>
+          <a:ext cx="0" cy="0"/>
+          <a:chOff x="0" y="0"/>
+          <a:chExt cx="0" cy="0"/>
+        </a:xfrm>
+      </p:grpSpPr>
       <p:sp>
         <p:nvSpPr>
           <p:cNvPr id="2" name="Rectangle 1"/>
@@ -22472,6 +24415,7 @@
           <a:lstStyle/>
           <a:p>
             <a:pPr algn="ctr"/>
+            <a:endParaRPr/>
           </a:p>
         </p:txBody>
       </p:sp>
@@ -22600,6 +24544,7 @@
           <a:lstStyle/>
           <a:p>
             <a:pPr algn="ctr"/>
+            <a:endParaRPr/>
           </a:p>
         </p:txBody>
       </p:sp>
@@ -22668,6 +24613,7 @@
           <a:lstStyle/>
           <a:p>
             <a:pPr algn="ctr"/>
+            <a:endParaRPr/>
           </a:p>
         </p:txBody>
       </p:sp>
@@ -22947,6 +24893,43 @@
                   <a:srgbClr val="64748B"/>
                 </a:solidFill>
                 <a:latin typeface="맑은 고딕"/>
+              </a:rPr>
+              <a:t>AURIX</a:t>
+            </a:r>
+          </a:p>
+        </p:txBody>
+      </p:sp>
+      <p:sp>
+        <p:nvSpPr>
+          <p:cNvPr id="90001" name="Watermark AURIX"/>
+          <p:cNvSpPr txBox="1"/>
+          <p:nvPr userDrawn="1"/>
+        </p:nvSpPr>
+        <p:spPr>
+          <a:xfrm rot="18300000">
+            <a:off x="2596000" y="2529000"/>
+            <a:ext cx="7000000" cy="1800000"/>
+          </a:xfrm>
+          <a:prstGeom prst="rect">
+            <a:avLst/>
+          </a:prstGeom>
+          <a:noFill/>
+        </p:spPr>
+        <p:txBody>
+          <a:bodyPr wrap="square" anchor="ctr" anchorCtr="1">
+            <a:noAutofit/>
+          </a:bodyPr>
+          <a:lstStyle/>
+          <a:p>
+            <a:pPr algn="ctr"/>
+            <a:r>
+              <a:rPr lang="en-US" sz="8000" b="1">
+                <a:solidFill>
+                  <a:srgbClr val="808080">
+                    <a:alpha val="25000"/>
+                  </a:srgbClr>
+                </a:solidFill>
+                <a:latin typeface="Arial"/>
               </a:rPr>
               <a:t>AURIX</a:t>
             </a:r>
